--- a/cdnapier_capstone_NSSDA13.pptx
+++ b/cdnapier_capstone_NSSDA13.pptx
@@ -8,8 +8,8 @@
     <p:notesMasterId r:id="rId23"/>
   </p:notesMasterIdLst>
   <p:sldIdLst>
-    <p:sldId id="256" r:id="rId2"/>
-    <p:sldId id="258" r:id="rId3"/>
+    <p:sldId id="258" r:id="rId2"/>
+    <p:sldId id="256" r:id="rId3"/>
     <p:sldId id="297" r:id="rId4"/>
     <p:sldId id="259" r:id="rId5"/>
     <p:sldId id="260" r:id="rId6"/>
@@ -21,14 +21,14 @@
     <p:sldId id="282" r:id="rId12"/>
     <p:sldId id="265" r:id="rId13"/>
     <p:sldId id="304" r:id="rId14"/>
-    <p:sldId id="271" r:id="rId15"/>
-    <p:sldId id="270" r:id="rId16"/>
-    <p:sldId id="305" r:id="rId17"/>
-    <p:sldId id="306" r:id="rId18"/>
-    <p:sldId id="307" r:id="rId19"/>
-    <p:sldId id="308" r:id="rId20"/>
-    <p:sldId id="311" r:id="rId21"/>
-    <p:sldId id="310" r:id="rId22"/>
+    <p:sldId id="270" r:id="rId15"/>
+    <p:sldId id="305" r:id="rId16"/>
+    <p:sldId id="306" r:id="rId17"/>
+    <p:sldId id="308" r:id="rId18"/>
+    <p:sldId id="310" r:id="rId19"/>
+    <p:sldId id="312" r:id="rId20"/>
+    <p:sldId id="307" r:id="rId21"/>
+    <p:sldId id="311" r:id="rId22"/>
   </p:sldIdLst>
   <p:sldSz cx="9144000" cy="5143500" type="screen16x9"/>
   <p:notesSz cx="6858000" cy="9144000"/>
@@ -284,6 +284,11 @@
       </a:defRPr>
     </a:lvl9pPr>
   </p:defaultTextStyle>
+  <p:extLst>
+    <p:ext uri="{EFAFB233-063F-42B5-8137-9DF3F51BA10A}">
+      <p15:sldGuideLst xmlns:p15="http://schemas.microsoft.com/office/powerpoint/2012/main"/>
+    </p:ext>
+  </p:extLst>
 </p:presentation>
 </file>
 
@@ -733,7 +738,7 @@
   <p:cSld>
     <p:spTree>
       <p:nvGrpSpPr>
-        <p:cNvPr id="1" name="Shape 150"/>
+        <p:cNvPr id="1" name="Shape 172"/>
         <p:cNvGrpSpPr/>
         <p:nvPr/>
       </p:nvGrpSpPr>
@@ -747,7 +752,7 @@
       </p:grpSpPr>
       <p:sp>
         <p:nvSpPr>
-          <p:cNvPr id="151" name="Google Shape;151;g35f391192_00:notes"/>
+          <p:cNvPr id="173" name="Google Shape;173;g35f391192_04:notes"/>
           <p:cNvSpPr>
             <a:spLocks noGrp="1" noRot="1" noChangeAspect="1"/>
           </p:cNvSpPr>
@@ -788,7 +793,7 @@
       </p:sp>
       <p:sp>
         <p:nvSpPr>
-          <p:cNvPr id="152" name="Google Shape;152;g35f391192_00:notes"/>
+          <p:cNvPr id="174" name="Google Shape;174;g35f391192_04:notes"/>
           <p:cNvSpPr txBox="1">
             <a:spLocks noGrp="1"/>
           </p:cNvSpPr>
@@ -1263,110 +1268,6 @@
   <p:cSld>
     <p:spTree>
       <p:nvGrpSpPr>
-        <p:cNvPr id="1" name="Shape 347"/>
-        <p:cNvGrpSpPr/>
-        <p:nvPr/>
-      </p:nvGrpSpPr>
-      <p:grpSpPr>
-        <a:xfrm>
-          <a:off x="0" y="0"/>
-          <a:ext cx="0" cy="0"/>
-          <a:chOff x="0" y="0"/>
-          <a:chExt cx="0" cy="0"/>
-        </a:xfrm>
-      </p:grpSpPr>
-      <p:sp>
-        <p:nvSpPr>
-          <p:cNvPr id="348" name="Google Shape;348;g35ed75ccf_033:notes"/>
-          <p:cNvSpPr>
-            <a:spLocks noGrp="1" noRot="1" noChangeAspect="1"/>
-          </p:cNvSpPr>
-          <p:nvPr>
-            <p:ph type="sldImg" idx="2"/>
-          </p:nvPr>
-        </p:nvSpPr>
-        <p:spPr>
-          <a:xfrm>
-            <a:off x="381000" y="685800"/>
-            <a:ext cx="6096000" cy="3429000"/>
-          </a:xfrm>
-          <a:custGeom>
-            <a:avLst/>
-            <a:gdLst/>
-            <a:ahLst/>
-            <a:cxnLst/>
-            <a:rect l="l" t="t" r="r" b="b"/>
-            <a:pathLst>
-              <a:path w="120000" h="120000" extrusionOk="0">
-                <a:moveTo>
-                  <a:pt x="0" y="0"/>
-                </a:moveTo>
-                <a:lnTo>
-                  <a:pt x="120000" y="0"/>
-                </a:lnTo>
-                <a:lnTo>
-                  <a:pt x="120000" y="120000"/>
-                </a:lnTo>
-                <a:lnTo>
-                  <a:pt x="0" y="120000"/>
-                </a:lnTo>
-                <a:close/>
-              </a:path>
-            </a:pathLst>
-          </a:custGeom>
-        </p:spPr>
-      </p:sp>
-      <p:sp>
-        <p:nvSpPr>
-          <p:cNvPr id="349" name="Google Shape;349;g35ed75ccf_033:notes"/>
-          <p:cNvSpPr txBox="1">
-            <a:spLocks noGrp="1"/>
-          </p:cNvSpPr>
-          <p:nvPr>
-            <p:ph type="body" idx="1"/>
-          </p:nvPr>
-        </p:nvSpPr>
-        <p:spPr>
-          <a:xfrm>
-            <a:off x="685800" y="4343400"/>
-            <a:ext cx="5486400" cy="4114800"/>
-          </a:xfrm>
-          <a:prstGeom prst="rect">
-            <a:avLst/>
-          </a:prstGeom>
-        </p:spPr>
-        <p:txBody>
-          <a:bodyPr spcFirstLastPara="1" wrap="square" lIns="91425" tIns="91425" rIns="91425" bIns="91425" anchor="t" anchorCtr="0">
-            <a:noAutofit/>
-          </a:bodyPr>
-          <a:lstStyle/>
-          <a:p>
-            <a:pPr marL="0" lvl="0" indent="0" algn="l" rtl="0">
-              <a:spcBef>
-                <a:spcPts val="0"/>
-              </a:spcBef>
-              <a:spcAft>
-                <a:spcPts val="0"/>
-              </a:spcAft>
-              <a:buNone/>
-            </a:pPr>
-            <a:endParaRPr/>
-          </a:p>
-        </p:txBody>
-      </p:sp>
-    </p:spTree>
-  </p:cSld>
-  <p:clrMapOvr>
-    <a:masterClrMapping/>
-  </p:clrMapOvr>
-</p:notes>
-</file>
-
-<file path=ppt/notesSlides/notesSlide15.xml><?xml version="1.0" encoding="utf-8"?>
-<p:notes xmlns:a="http://schemas.openxmlformats.org/drawingml/2006/main" xmlns:r="http://schemas.openxmlformats.org/officeDocument/2006/relationships" xmlns:p="http://schemas.openxmlformats.org/presentationml/2006/main" showMasterSp="0" showMasterPhAnim="0">
-  <p:cSld>
-    <p:spTree>
-      <p:nvGrpSpPr>
         <p:cNvPr id="1" name="Shape 340"/>
         <p:cNvGrpSpPr/>
         <p:nvPr/>
@@ -1466,7 +1367,7 @@
 </p:notes>
 </file>
 
-<file path=ppt/notesSlides/notesSlide16.xml><?xml version="1.0" encoding="utf-8"?>
+<file path=ppt/notesSlides/notesSlide15.xml><?xml version="1.0" encoding="utf-8"?>
 <p:notes xmlns:a="http://schemas.openxmlformats.org/drawingml/2006/main" xmlns:r="http://schemas.openxmlformats.org/officeDocument/2006/relationships" xmlns:p="http://schemas.openxmlformats.org/presentationml/2006/main" showMasterSp="0" showMasterPhAnim="0">
   <p:cSld>
     <p:spTree>
@@ -1566,6 +1467,115 @@
     <p:extLst>
       <p:ext uri="{BB962C8B-B14F-4D97-AF65-F5344CB8AC3E}">
         <p14:creationId xmlns:p14="http://schemas.microsoft.com/office/powerpoint/2010/main" val="1689838366"/>
+      </p:ext>
+    </p:extLst>
+  </p:cSld>
+  <p:clrMapOvr>
+    <a:masterClrMapping/>
+  </p:clrMapOvr>
+</p:notes>
+</file>
+
+<file path=ppt/notesSlides/notesSlide16.xml><?xml version="1.0" encoding="utf-8"?>
+<p:notes xmlns:a="http://schemas.openxmlformats.org/drawingml/2006/main" xmlns:r="http://schemas.openxmlformats.org/officeDocument/2006/relationships" xmlns:p="http://schemas.openxmlformats.org/presentationml/2006/main" showMasterSp="0" showMasterPhAnim="0">
+  <p:cSld>
+    <p:spTree>
+      <p:nvGrpSpPr>
+        <p:cNvPr id="1" name="Shape 197"/>
+        <p:cNvGrpSpPr/>
+        <p:nvPr/>
+      </p:nvGrpSpPr>
+      <p:grpSpPr>
+        <a:xfrm>
+          <a:off x="0" y="0"/>
+          <a:ext cx="0" cy="0"/>
+          <a:chOff x="0" y="0"/>
+          <a:chExt cx="0" cy="0"/>
+        </a:xfrm>
+      </p:grpSpPr>
+      <p:sp>
+        <p:nvSpPr>
+          <p:cNvPr id="198" name="Google Shape;198;p:notes"/>
+          <p:cNvSpPr>
+            <a:spLocks noGrp="1" noRot="1" noChangeAspect="1"/>
+          </p:cNvSpPr>
+          <p:nvPr>
+            <p:ph type="sldImg" idx="2"/>
+          </p:nvPr>
+        </p:nvSpPr>
+        <p:spPr>
+          <a:xfrm>
+            <a:off x="381000" y="685800"/>
+            <a:ext cx="6096000" cy="3429000"/>
+          </a:xfrm>
+          <a:custGeom>
+            <a:avLst/>
+            <a:gdLst/>
+            <a:ahLst/>
+            <a:cxnLst/>
+            <a:rect l="l" t="t" r="r" b="b"/>
+            <a:pathLst>
+              <a:path w="120000" h="120000" extrusionOk="0">
+                <a:moveTo>
+                  <a:pt x="0" y="0"/>
+                </a:moveTo>
+                <a:lnTo>
+                  <a:pt x="120000" y="0"/>
+                </a:lnTo>
+                <a:lnTo>
+                  <a:pt x="120000" y="120000"/>
+                </a:lnTo>
+                <a:lnTo>
+                  <a:pt x="0" y="120000"/>
+                </a:lnTo>
+                <a:close/>
+              </a:path>
+            </a:pathLst>
+          </a:custGeom>
+        </p:spPr>
+      </p:sp>
+      <p:sp>
+        <p:nvSpPr>
+          <p:cNvPr id="199" name="Google Shape;199;p:notes"/>
+          <p:cNvSpPr txBox="1">
+            <a:spLocks noGrp="1"/>
+          </p:cNvSpPr>
+          <p:nvPr>
+            <p:ph type="body" idx="1"/>
+          </p:nvPr>
+        </p:nvSpPr>
+        <p:spPr>
+          <a:xfrm>
+            <a:off x="685800" y="4343400"/>
+            <a:ext cx="5486400" cy="4114800"/>
+          </a:xfrm>
+          <a:prstGeom prst="rect">
+            <a:avLst/>
+          </a:prstGeom>
+        </p:spPr>
+        <p:txBody>
+          <a:bodyPr spcFirstLastPara="1" wrap="square" lIns="91425" tIns="91425" rIns="91425" bIns="91425" anchor="t" anchorCtr="0">
+            <a:noAutofit/>
+          </a:bodyPr>
+          <a:lstStyle/>
+          <a:p>
+            <a:pPr marL="0" lvl="0" indent="0" algn="l" rtl="0">
+              <a:spcBef>
+                <a:spcPts val="0"/>
+              </a:spcBef>
+              <a:spcAft>
+                <a:spcPts val="0"/>
+              </a:spcAft>
+              <a:buNone/>
+            </a:pPr>
+            <a:endParaRPr/>
+          </a:p>
+        </p:txBody>
+      </p:sp>
+    </p:spTree>
+    <p:extLst>
+      <p:ext uri="{BB962C8B-B14F-4D97-AF65-F5344CB8AC3E}">
+        <p14:creationId xmlns:p14="http://schemas.microsoft.com/office/powerpoint/2010/main" val="881778011"/>
       </p:ext>
     </p:extLst>
   </p:cSld>
@@ -1674,7 +1684,7 @@
     </p:spTree>
     <p:extLst>
       <p:ext uri="{BB962C8B-B14F-4D97-AF65-F5344CB8AC3E}">
-        <p14:creationId xmlns:p14="http://schemas.microsoft.com/office/powerpoint/2010/main" val="881778011"/>
+        <p14:creationId xmlns:p14="http://schemas.microsoft.com/office/powerpoint/2010/main" val="3742841554"/>
       </p:ext>
     </p:extLst>
   </p:cSld>
@@ -1689,7 +1699,7 @@
   <p:cSld>
     <p:spTree>
       <p:nvGrpSpPr>
-        <p:cNvPr id="1" name="Shape 197"/>
+        <p:cNvPr id="1" name="Shape 340"/>
         <p:cNvGrpSpPr/>
         <p:nvPr/>
       </p:nvGrpSpPr>
@@ -1703,7 +1713,7 @@
       </p:grpSpPr>
       <p:sp>
         <p:nvSpPr>
-          <p:cNvPr id="198" name="Google Shape;198;p:notes"/>
+          <p:cNvPr id="341" name="Google Shape;341;g35ed75ccf_028:notes"/>
           <p:cNvSpPr>
             <a:spLocks noGrp="1" noRot="1" noChangeAspect="1"/>
           </p:cNvSpPr>
@@ -1744,7 +1754,7 @@
       </p:sp>
       <p:sp>
         <p:nvSpPr>
-          <p:cNvPr id="199" name="Google Shape;199;p:notes"/>
+          <p:cNvPr id="342" name="Google Shape;342;g35ed75ccf_028:notes"/>
           <p:cNvSpPr txBox="1">
             <a:spLocks noGrp="1"/>
           </p:cNvSpPr>
@@ -1783,7 +1793,7 @@
     </p:spTree>
     <p:extLst>
       <p:ext uri="{BB962C8B-B14F-4D97-AF65-F5344CB8AC3E}">
-        <p14:creationId xmlns:p14="http://schemas.microsoft.com/office/powerpoint/2010/main" val="554623259"/>
+        <p14:creationId xmlns:p14="http://schemas.microsoft.com/office/powerpoint/2010/main" val="3836561224"/>
       </p:ext>
     </p:extLst>
   </p:cSld>
@@ -1798,7 +1808,7 @@
   <p:cSld>
     <p:spTree>
       <p:nvGrpSpPr>
-        <p:cNvPr id="1" name="Shape 197"/>
+        <p:cNvPr id="1" name="Shape 180"/>
         <p:cNvGrpSpPr/>
         <p:nvPr/>
       </p:nvGrpSpPr>
@@ -1812,7 +1822,7 @@
       </p:grpSpPr>
       <p:sp>
         <p:nvSpPr>
-          <p:cNvPr id="198" name="Google Shape;198;p:notes"/>
+          <p:cNvPr id="181" name="Google Shape;181;g35f391192_029:notes"/>
           <p:cNvSpPr>
             <a:spLocks noGrp="1" noRot="1" noChangeAspect="1"/>
           </p:cNvSpPr>
@@ -1853,7 +1863,7 @@
       </p:sp>
       <p:sp>
         <p:nvSpPr>
-          <p:cNvPr id="199" name="Google Shape;199;p:notes"/>
+          <p:cNvPr id="182" name="Google Shape;182;g35f391192_029:notes"/>
           <p:cNvSpPr txBox="1">
             <a:spLocks noGrp="1"/>
           </p:cNvSpPr>
@@ -1892,7 +1902,7 @@
     </p:spTree>
     <p:extLst>
       <p:ext uri="{BB962C8B-B14F-4D97-AF65-F5344CB8AC3E}">
-        <p14:creationId xmlns:p14="http://schemas.microsoft.com/office/powerpoint/2010/main" val="3742841554"/>
+        <p14:creationId xmlns:p14="http://schemas.microsoft.com/office/powerpoint/2010/main" val="3777786355"/>
       </p:ext>
     </p:extLst>
   </p:cSld>
@@ -1907,7 +1917,7 @@
   <p:cSld>
     <p:spTree>
       <p:nvGrpSpPr>
-        <p:cNvPr id="1" name="Shape 172"/>
+        <p:cNvPr id="1" name="Shape 150"/>
         <p:cNvGrpSpPr/>
         <p:nvPr/>
       </p:nvGrpSpPr>
@@ -1921,7 +1931,7 @@
       </p:grpSpPr>
       <p:sp>
         <p:nvSpPr>
-          <p:cNvPr id="173" name="Google Shape;173;g35f391192_04:notes"/>
+          <p:cNvPr id="151" name="Google Shape;151;g35f391192_00:notes"/>
           <p:cNvSpPr>
             <a:spLocks noGrp="1" noRot="1" noChangeAspect="1"/>
           </p:cNvSpPr>
@@ -1962,7 +1972,7 @@
       </p:sp>
       <p:sp>
         <p:nvSpPr>
-          <p:cNvPr id="174" name="Google Shape;174;g35f391192_04:notes"/>
+          <p:cNvPr id="152" name="Google Shape;152;g35f391192_00:notes"/>
           <p:cNvSpPr txBox="1">
             <a:spLocks noGrp="1"/>
           </p:cNvSpPr>
@@ -2105,7 +2115,7 @@
     </p:spTree>
     <p:extLst>
       <p:ext uri="{BB962C8B-B14F-4D97-AF65-F5344CB8AC3E}">
-        <p14:creationId xmlns:p14="http://schemas.microsoft.com/office/powerpoint/2010/main" val="472282242"/>
+        <p14:creationId xmlns:p14="http://schemas.microsoft.com/office/powerpoint/2010/main" val="554623259"/>
       </p:ext>
     </p:extLst>
   </p:cSld>
@@ -2120,7 +2130,7 @@
   <p:cSld>
     <p:spTree>
       <p:nvGrpSpPr>
-        <p:cNvPr id="1" name="Shape 340"/>
+        <p:cNvPr id="1" name="Shape 197"/>
         <p:cNvGrpSpPr/>
         <p:nvPr/>
       </p:nvGrpSpPr>
@@ -2134,7 +2144,7 @@
       </p:grpSpPr>
       <p:sp>
         <p:nvSpPr>
-          <p:cNvPr id="341" name="Google Shape;341;g35ed75ccf_028:notes"/>
+          <p:cNvPr id="198" name="Google Shape;198;p:notes"/>
           <p:cNvSpPr>
             <a:spLocks noGrp="1" noRot="1" noChangeAspect="1"/>
           </p:cNvSpPr>
@@ -2175,7 +2185,7 @@
       </p:sp>
       <p:sp>
         <p:nvSpPr>
-          <p:cNvPr id="342" name="Google Shape;342;g35ed75ccf_028:notes"/>
+          <p:cNvPr id="199" name="Google Shape;199;p:notes"/>
           <p:cNvSpPr txBox="1">
             <a:spLocks noGrp="1"/>
           </p:cNvSpPr>
@@ -2214,7 +2224,7 @@
     </p:spTree>
     <p:extLst>
       <p:ext uri="{BB962C8B-B14F-4D97-AF65-F5344CB8AC3E}">
-        <p14:creationId xmlns:p14="http://schemas.microsoft.com/office/powerpoint/2010/main" val="3836561224"/>
+        <p14:creationId xmlns:p14="http://schemas.microsoft.com/office/powerpoint/2010/main" val="472282242"/>
       </p:ext>
     </p:extLst>
   </p:cSld>
@@ -9073,9 +9083,17 @@
 <file path=ppt/slides/slide1.xml><?xml version="1.0" encoding="utf-8"?>
 <p:sld xmlns:a="http://schemas.openxmlformats.org/drawingml/2006/main" xmlns:r="http://schemas.openxmlformats.org/officeDocument/2006/relationships" xmlns:p="http://schemas.openxmlformats.org/presentationml/2006/main">
   <p:cSld>
+    <p:bg>
+      <p:bgPr>
+        <a:solidFill>
+          <a:schemeClr val="lt1"/>
+        </a:solidFill>
+        <a:effectLst/>
+      </p:bgPr>
+    </p:bg>
     <p:spTree>
       <p:nvGrpSpPr>
-        <p:cNvPr id="1" name="Shape 153"/>
+        <p:cNvPr id="1" name="Shape 175"/>
         <p:cNvGrpSpPr/>
         <p:nvPr/>
       </p:nvGrpSpPr>
@@ -9087,493 +9105,164 @@
           <a:chExt cx="0" cy="0"/>
         </a:xfrm>
       </p:grpSpPr>
-      <p:grpSp>
-        <p:nvGrpSpPr>
-          <p:cNvPr id="154" name="Google Shape;154;p13"/>
-          <p:cNvGrpSpPr/>
-          <p:nvPr/>
-        </p:nvGrpSpPr>
-        <p:grpSpPr>
-          <a:xfrm>
-            <a:off x="8013742" y="4015142"/>
-            <a:ext cx="600715" cy="600715"/>
-            <a:chOff x="8762414" y="2939573"/>
-            <a:chExt cx="457200" cy="457200"/>
-          </a:xfrm>
-        </p:grpSpPr>
-        <p:sp>
-          <p:nvSpPr>
-            <p:cNvPr id="155" name="Google Shape;155;p13"/>
-            <p:cNvSpPr/>
-            <p:nvPr/>
-          </p:nvSpPr>
-          <p:spPr>
-            <a:xfrm>
-              <a:off x="9010064" y="3034823"/>
-              <a:ext cx="209550" cy="66675"/>
-            </a:xfrm>
-            <a:custGeom>
-              <a:avLst/>
-              <a:gdLst/>
-              <a:ahLst/>
-              <a:cxnLst/>
-              <a:rect l="l" t="t" r="r" b="b"/>
-              <a:pathLst>
-                <a:path w="209550" h="66675" extrusionOk="0">
-                  <a:moveTo>
-                    <a:pt x="200025" y="0"/>
-                  </a:moveTo>
-                  <a:lnTo>
-                    <a:pt x="9525" y="0"/>
-                  </a:lnTo>
-                  <a:cubicBezTo>
-                    <a:pt x="3810" y="0"/>
-                    <a:pt x="0" y="3810"/>
-                    <a:pt x="0" y="9525"/>
-                  </a:cubicBezTo>
-                  <a:lnTo>
-                    <a:pt x="0" y="57150"/>
-                  </a:lnTo>
-                  <a:cubicBezTo>
-                    <a:pt x="0" y="62865"/>
-                    <a:pt x="3810" y="66675"/>
-                    <a:pt x="9525" y="66675"/>
-                  </a:cubicBezTo>
-                  <a:lnTo>
-                    <a:pt x="200025" y="66675"/>
-                  </a:lnTo>
-                  <a:cubicBezTo>
-                    <a:pt x="205740" y="66675"/>
-                    <a:pt x="209550" y="62865"/>
-                    <a:pt x="209550" y="57150"/>
-                  </a:cubicBezTo>
-                  <a:lnTo>
-                    <a:pt x="209550" y="9525"/>
-                  </a:lnTo>
-                  <a:cubicBezTo>
-                    <a:pt x="209550" y="3810"/>
-                    <a:pt x="205740" y="0"/>
-                    <a:pt x="200025" y="0"/>
-                  </a:cubicBezTo>
-                  <a:close/>
-                </a:path>
-              </a:pathLst>
-            </a:custGeom>
-            <a:solidFill>
-              <a:schemeClr val="lt1"/>
-            </a:solidFill>
-            <a:ln>
-              <a:noFill/>
-            </a:ln>
-            <a:effectLst>
-              <a:outerShdw dist="19050" dir="5400000" algn="bl" rotWithShape="0">
-                <a:schemeClr val="dk1">
-                  <a:alpha val="20000"/>
-                </a:schemeClr>
-              </a:outerShdw>
-            </a:effectLst>
-          </p:spPr>
-          <p:txBody>
-            <a:bodyPr spcFirstLastPara="1" wrap="square" lIns="91425" tIns="45700" rIns="91425" bIns="45700" anchor="ctr" anchorCtr="0">
-              <a:noAutofit/>
-            </a:bodyPr>
-            <a:lstStyle/>
-            <a:p>
-              <a:pPr marL="0" marR="0" lvl="0" indent="0" algn="l" rtl="0">
-                <a:spcBef>
-                  <a:spcPts val="0"/>
-                </a:spcBef>
-                <a:spcAft>
-                  <a:spcPts val="0"/>
-                </a:spcAft>
-                <a:buNone/>
-              </a:pPr>
-              <a:endParaRPr sz="1800">
-                <a:solidFill>
-                  <a:srgbClr val="000000"/>
-                </a:solidFill>
-                <a:latin typeface="Calibri"/>
-                <a:ea typeface="Calibri"/>
-                <a:cs typeface="Calibri"/>
-                <a:sym typeface="Calibri"/>
-              </a:endParaRPr>
-            </a:p>
-          </p:txBody>
-        </p:sp>
-        <p:sp>
-          <p:nvSpPr>
-            <p:cNvPr id="156" name="Google Shape;156;p13"/>
-            <p:cNvSpPr/>
-            <p:nvPr/>
-          </p:nvSpPr>
-          <p:spPr>
-            <a:xfrm>
-              <a:off x="9029114" y="3120548"/>
-              <a:ext cx="171450" cy="276225"/>
-            </a:xfrm>
-            <a:custGeom>
-              <a:avLst/>
-              <a:gdLst/>
-              <a:ahLst/>
-              <a:cxnLst/>
-              <a:rect l="l" t="t" r="r" b="b"/>
-              <a:pathLst>
-                <a:path w="171450" h="276225" extrusionOk="0">
-                  <a:moveTo>
-                    <a:pt x="0" y="266700"/>
-                  </a:moveTo>
-                  <a:cubicBezTo>
-                    <a:pt x="0" y="272415"/>
-                    <a:pt x="3810" y="276225"/>
-                    <a:pt x="9525" y="276225"/>
-                  </a:cubicBezTo>
-                  <a:lnTo>
-                    <a:pt x="161925" y="276225"/>
-                  </a:lnTo>
-                  <a:cubicBezTo>
-                    <a:pt x="167640" y="276225"/>
-                    <a:pt x="171450" y="272415"/>
-                    <a:pt x="171450" y="266700"/>
-                  </a:cubicBezTo>
-                  <a:lnTo>
-                    <a:pt x="171450" y="0"/>
-                  </a:lnTo>
-                  <a:lnTo>
-                    <a:pt x="0" y="0"/>
-                  </a:lnTo>
-                  <a:lnTo>
-                    <a:pt x="0" y="266700"/>
-                  </a:lnTo>
-                  <a:close/>
-                  <a:moveTo>
-                    <a:pt x="28575" y="57150"/>
-                  </a:moveTo>
-                  <a:cubicBezTo>
-                    <a:pt x="28575" y="51435"/>
-                    <a:pt x="32385" y="47625"/>
-                    <a:pt x="38100" y="47625"/>
-                  </a:cubicBezTo>
-                  <a:lnTo>
-                    <a:pt x="133350" y="47625"/>
-                  </a:lnTo>
-                  <a:cubicBezTo>
-                    <a:pt x="139065" y="47625"/>
-                    <a:pt x="142875" y="51435"/>
-                    <a:pt x="142875" y="57150"/>
-                  </a:cubicBezTo>
-                  <a:lnTo>
-                    <a:pt x="142875" y="123825"/>
-                  </a:lnTo>
-                  <a:cubicBezTo>
-                    <a:pt x="142875" y="129540"/>
-                    <a:pt x="139065" y="133350"/>
-                    <a:pt x="133350" y="133350"/>
-                  </a:cubicBezTo>
-                  <a:lnTo>
-                    <a:pt x="38100" y="133350"/>
-                  </a:lnTo>
-                  <a:cubicBezTo>
-                    <a:pt x="32385" y="133350"/>
-                    <a:pt x="28575" y="129540"/>
-                    <a:pt x="28575" y="123825"/>
-                  </a:cubicBezTo>
-                  <a:lnTo>
-                    <a:pt x="28575" y="57150"/>
-                  </a:lnTo>
-                  <a:close/>
-                  <a:moveTo>
-                    <a:pt x="38100" y="161925"/>
-                  </a:moveTo>
-                  <a:lnTo>
-                    <a:pt x="133350" y="161925"/>
-                  </a:lnTo>
-                  <a:cubicBezTo>
-                    <a:pt x="139065" y="161925"/>
-                    <a:pt x="142875" y="165735"/>
-                    <a:pt x="142875" y="171450"/>
-                  </a:cubicBezTo>
-                  <a:cubicBezTo>
-                    <a:pt x="142875" y="177165"/>
-                    <a:pt x="139065" y="180975"/>
-                    <a:pt x="133350" y="180975"/>
-                  </a:cubicBezTo>
-                  <a:lnTo>
-                    <a:pt x="38100" y="180975"/>
-                  </a:lnTo>
-                  <a:cubicBezTo>
-                    <a:pt x="32385" y="180975"/>
-                    <a:pt x="28575" y="177165"/>
-                    <a:pt x="28575" y="171450"/>
-                  </a:cubicBezTo>
-                  <a:cubicBezTo>
-                    <a:pt x="28575" y="165735"/>
-                    <a:pt x="32385" y="161925"/>
-                    <a:pt x="38100" y="161925"/>
-                  </a:cubicBezTo>
-                  <a:close/>
-                </a:path>
-              </a:pathLst>
-            </a:custGeom>
-            <a:solidFill>
-              <a:schemeClr val="lt1"/>
-            </a:solidFill>
-            <a:ln>
-              <a:noFill/>
-            </a:ln>
-            <a:effectLst>
-              <a:outerShdw dist="19050" dir="5400000" algn="bl" rotWithShape="0">
-                <a:schemeClr val="dk1">
-                  <a:alpha val="20000"/>
-                </a:schemeClr>
-              </a:outerShdw>
-            </a:effectLst>
-          </p:spPr>
-          <p:txBody>
-            <a:bodyPr spcFirstLastPara="1" wrap="square" lIns="91425" tIns="45700" rIns="91425" bIns="45700" anchor="ctr" anchorCtr="0">
-              <a:noAutofit/>
-            </a:bodyPr>
-            <a:lstStyle/>
-            <a:p>
-              <a:pPr marL="0" marR="0" lvl="0" indent="0" algn="l" rtl="0">
-                <a:spcBef>
-                  <a:spcPts val="0"/>
-                </a:spcBef>
-                <a:spcAft>
-                  <a:spcPts val="0"/>
-                </a:spcAft>
-                <a:buNone/>
-              </a:pPr>
-              <a:endParaRPr sz="1800">
-                <a:solidFill>
-                  <a:srgbClr val="000000"/>
-                </a:solidFill>
-                <a:latin typeface="Calibri"/>
-                <a:ea typeface="Calibri"/>
-                <a:cs typeface="Calibri"/>
-                <a:sym typeface="Calibri"/>
-              </a:endParaRPr>
-            </a:p>
-          </p:txBody>
-        </p:sp>
-        <p:sp>
-          <p:nvSpPr>
-            <p:cNvPr id="157" name="Google Shape;157;p13"/>
-            <p:cNvSpPr/>
-            <p:nvPr/>
-          </p:nvSpPr>
-          <p:spPr>
-            <a:xfrm>
-              <a:off x="8762414" y="2939573"/>
-              <a:ext cx="200025" cy="457200"/>
-            </a:xfrm>
-            <a:custGeom>
-              <a:avLst/>
-              <a:gdLst/>
-              <a:ahLst/>
-              <a:cxnLst/>
-              <a:rect l="l" t="t" r="r" b="b"/>
-              <a:pathLst>
-                <a:path w="200025" h="457200" extrusionOk="0">
-                  <a:moveTo>
-                    <a:pt x="185738" y="76200"/>
-                  </a:moveTo>
-                  <a:lnTo>
-                    <a:pt x="133350" y="76200"/>
-                  </a:lnTo>
-                  <a:lnTo>
-                    <a:pt x="133350" y="28575"/>
-                  </a:lnTo>
-                  <a:lnTo>
-                    <a:pt x="157163" y="28575"/>
-                  </a:lnTo>
-                  <a:cubicBezTo>
-                    <a:pt x="164783" y="28575"/>
-                    <a:pt x="171450" y="21908"/>
-                    <a:pt x="171450" y="14288"/>
-                  </a:cubicBezTo>
-                  <a:cubicBezTo>
-                    <a:pt x="171450" y="6668"/>
-                    <a:pt x="164783" y="0"/>
-                    <a:pt x="157163" y="0"/>
-                  </a:cubicBezTo>
-                  <a:lnTo>
-                    <a:pt x="42863" y="0"/>
-                  </a:lnTo>
-                  <a:cubicBezTo>
-                    <a:pt x="35243" y="0"/>
-                    <a:pt x="28575" y="6668"/>
-                    <a:pt x="28575" y="14288"/>
-                  </a:cubicBezTo>
-                  <a:cubicBezTo>
-                    <a:pt x="28575" y="21908"/>
-                    <a:pt x="35243" y="28575"/>
-                    <a:pt x="42863" y="28575"/>
-                  </a:cubicBezTo>
-                  <a:lnTo>
-                    <a:pt x="66675" y="28575"/>
-                  </a:lnTo>
-                  <a:lnTo>
-                    <a:pt x="66675" y="76200"/>
-                  </a:lnTo>
-                  <a:lnTo>
-                    <a:pt x="14288" y="76200"/>
-                  </a:lnTo>
-                  <a:cubicBezTo>
-                    <a:pt x="6668" y="76200"/>
-                    <a:pt x="0" y="82868"/>
-                    <a:pt x="0" y="90488"/>
-                  </a:cubicBezTo>
-                  <a:cubicBezTo>
-                    <a:pt x="0" y="98108"/>
-                    <a:pt x="6668" y="104775"/>
-                    <a:pt x="14288" y="104775"/>
-                  </a:cubicBezTo>
-                  <a:lnTo>
-                    <a:pt x="47625" y="104775"/>
-                  </a:lnTo>
-                  <a:lnTo>
-                    <a:pt x="47625" y="323850"/>
-                  </a:lnTo>
-                  <a:cubicBezTo>
-                    <a:pt x="47625" y="334328"/>
-                    <a:pt x="56198" y="342900"/>
-                    <a:pt x="66675" y="342900"/>
-                  </a:cubicBezTo>
-                  <a:lnTo>
-                    <a:pt x="66675" y="361950"/>
-                  </a:lnTo>
-                  <a:cubicBezTo>
-                    <a:pt x="66675" y="367665"/>
-                    <a:pt x="70485" y="371475"/>
-                    <a:pt x="76200" y="371475"/>
-                  </a:cubicBezTo>
-                  <a:lnTo>
-                    <a:pt x="85725" y="371475"/>
-                  </a:lnTo>
-                  <a:lnTo>
-                    <a:pt x="85725" y="442913"/>
-                  </a:lnTo>
-                  <a:cubicBezTo>
-                    <a:pt x="85725" y="450533"/>
-                    <a:pt x="92393" y="457200"/>
-                    <a:pt x="100013" y="457200"/>
-                  </a:cubicBezTo>
-                  <a:cubicBezTo>
-                    <a:pt x="107633" y="457200"/>
-                    <a:pt x="114300" y="450533"/>
-                    <a:pt x="114300" y="442913"/>
-                  </a:cubicBezTo>
-                  <a:lnTo>
-                    <a:pt x="114300" y="371475"/>
-                  </a:lnTo>
-                  <a:lnTo>
-                    <a:pt x="123825" y="371475"/>
-                  </a:lnTo>
-                  <a:cubicBezTo>
-                    <a:pt x="129540" y="371475"/>
-                    <a:pt x="133350" y="367665"/>
-                    <a:pt x="133350" y="361950"/>
-                  </a:cubicBezTo>
-                  <a:lnTo>
-                    <a:pt x="133350" y="342900"/>
-                  </a:lnTo>
-                  <a:cubicBezTo>
-                    <a:pt x="143828" y="342900"/>
-                    <a:pt x="152400" y="334328"/>
-                    <a:pt x="152400" y="323850"/>
-                  </a:cubicBezTo>
-                  <a:lnTo>
-                    <a:pt x="152400" y="104775"/>
-                  </a:lnTo>
-                  <a:lnTo>
-                    <a:pt x="185738" y="104775"/>
-                  </a:lnTo>
-                  <a:cubicBezTo>
-                    <a:pt x="193358" y="104775"/>
-                    <a:pt x="200025" y="98108"/>
-                    <a:pt x="200025" y="90488"/>
-                  </a:cubicBezTo>
-                  <a:cubicBezTo>
-                    <a:pt x="200025" y="82868"/>
-                    <a:pt x="193358" y="76200"/>
-                    <a:pt x="185738" y="76200"/>
-                  </a:cubicBezTo>
-                  <a:close/>
-                  <a:moveTo>
-                    <a:pt x="123825" y="247650"/>
-                  </a:moveTo>
-                  <a:lnTo>
-                    <a:pt x="76200" y="247650"/>
-                  </a:lnTo>
-                  <a:lnTo>
-                    <a:pt x="76200" y="123825"/>
-                  </a:lnTo>
-                  <a:lnTo>
-                    <a:pt x="123825" y="123825"/>
-                  </a:lnTo>
-                  <a:lnTo>
-                    <a:pt x="123825" y="247650"/>
-                  </a:lnTo>
-                  <a:close/>
-                </a:path>
-              </a:pathLst>
-            </a:custGeom>
-            <a:solidFill>
-              <a:schemeClr val="lt1"/>
-            </a:solidFill>
-            <a:ln>
-              <a:noFill/>
-            </a:ln>
-            <a:effectLst>
-              <a:outerShdw dist="19050" dir="5400000" algn="bl" rotWithShape="0">
-                <a:schemeClr val="dk1">
-                  <a:alpha val="20000"/>
-                </a:schemeClr>
-              </a:outerShdw>
-            </a:effectLst>
-          </p:spPr>
-          <p:txBody>
-            <a:bodyPr spcFirstLastPara="1" wrap="square" lIns="91425" tIns="45700" rIns="91425" bIns="45700" anchor="ctr" anchorCtr="0">
-              <a:noAutofit/>
-            </a:bodyPr>
-            <a:lstStyle/>
-            <a:p>
-              <a:pPr marL="0" marR="0" lvl="0" indent="0" algn="l" rtl="0">
-                <a:spcBef>
-                  <a:spcPts val="0"/>
-                </a:spcBef>
-                <a:spcAft>
-                  <a:spcPts val="0"/>
-                </a:spcAft>
-                <a:buNone/>
-              </a:pPr>
-              <a:endParaRPr sz="1800">
-                <a:solidFill>
-                  <a:srgbClr val="000000"/>
-                </a:solidFill>
-                <a:latin typeface="Calibri"/>
-                <a:ea typeface="Calibri"/>
-                <a:cs typeface="Calibri"/>
-                <a:sym typeface="Calibri"/>
-              </a:endParaRPr>
-            </a:p>
-          </p:txBody>
-        </p:sp>
-      </p:grpSp>
       <p:sp>
         <p:nvSpPr>
-          <p:cNvPr id="158" name="Google Shape;158;p13"/>
+          <p:cNvPr id="176" name="Google Shape;176;p15"/>
           <p:cNvSpPr txBox="1">
             <a:spLocks noGrp="1"/>
           </p:cNvSpPr>
           <p:nvPr>
-            <p:ph type="ctrTitle"/>
+            <p:ph type="title"/>
           </p:nvPr>
         </p:nvSpPr>
         <p:spPr>
           <a:xfrm>
-            <a:off x="614975" y="3124850"/>
-            <a:ext cx="6058800" cy="1532100"/>
+            <a:off x="614975" y="899100"/>
+            <a:ext cx="3613200" cy="1228500"/>
+          </a:xfrm>
+          <a:prstGeom prst="rect">
+            <a:avLst/>
+          </a:prstGeom>
+        </p:spPr>
+        <p:txBody>
+          <a:bodyPr spcFirstLastPara="1" wrap="square" lIns="0" tIns="0" rIns="0" bIns="0" anchor="t" anchorCtr="0">
+            <a:noAutofit/>
+          </a:bodyPr>
+          <a:lstStyle/>
+          <a:p>
+            <a:pPr marL="0" lvl="0" indent="0" algn="l" rtl="0">
+              <a:spcBef>
+                <a:spcPts val="0"/>
+              </a:spcBef>
+              <a:spcAft>
+                <a:spcPts val="0"/>
+              </a:spcAft>
+              <a:buNone/>
+            </a:pPr>
+            <a:r>
+              <a:rPr lang="en" sz="9600"/>
+              <a:t>Hello!</a:t>
+            </a:r>
+            <a:endParaRPr sz="9600"/>
+          </a:p>
+        </p:txBody>
+      </p:sp>
+      <p:sp>
+        <p:nvSpPr>
+          <p:cNvPr id="177" name="Google Shape;177;p15"/>
+          <p:cNvSpPr txBox="1">
+            <a:spLocks noGrp="1"/>
+          </p:cNvSpPr>
+          <p:nvPr>
+            <p:ph type="body" idx="1"/>
+          </p:nvPr>
+        </p:nvSpPr>
+        <p:spPr>
+          <a:xfrm>
+            <a:off x="273143" y="2199741"/>
+            <a:ext cx="4076665" cy="2329530"/>
+          </a:xfrm>
+          <a:prstGeom prst="rect">
+            <a:avLst/>
+          </a:prstGeom>
+        </p:spPr>
+        <p:txBody>
+          <a:bodyPr spcFirstLastPara="1" wrap="square" lIns="0" tIns="0" rIns="0" bIns="0" anchor="t" anchorCtr="0">
+            <a:noAutofit/>
+          </a:bodyPr>
+          <a:lstStyle/>
+          <a:p>
+            <a:pPr marL="0" lvl="0" indent="0" algn="l" rtl="0">
+              <a:spcBef>
+                <a:spcPts val="600"/>
+              </a:spcBef>
+              <a:spcAft>
+                <a:spcPts val="0"/>
+              </a:spcAft>
+              <a:buNone/>
+            </a:pPr>
+            <a:r>
+              <a:rPr lang="en" b="1" dirty="0">
+                <a:solidFill>
+                  <a:schemeClr val="accent3"/>
+                </a:solidFill>
+                <a:latin typeface="Barlow"/>
+                <a:ea typeface="Barlow"/>
+                <a:cs typeface="Barlow"/>
+                <a:sym typeface="Barlow"/>
+              </a:rPr>
+              <a:t>I’m </a:t>
+            </a:r>
+            <a:r>
+              <a:rPr lang="en-US" b="1" dirty="0">
+                <a:solidFill>
+                  <a:schemeClr val="accent3"/>
+                </a:solidFill>
+                <a:latin typeface="Barlow"/>
+                <a:ea typeface="Barlow"/>
+                <a:cs typeface="Barlow"/>
+                <a:sym typeface="Barlow"/>
+              </a:rPr>
+              <a:t>Charlie Napier</a:t>
+            </a:r>
+            <a:endParaRPr b="1" dirty="0">
+              <a:solidFill>
+                <a:schemeClr val="accent3"/>
+              </a:solidFill>
+              <a:latin typeface="Barlow"/>
+              <a:ea typeface="Barlow"/>
+              <a:cs typeface="Barlow"/>
+              <a:sym typeface="Barlow"/>
+            </a:endParaRPr>
+          </a:p>
+          <a:p>
+            <a:pPr marL="342900" indent="-342900">
+              <a:buClr>
+                <a:schemeClr val="dk1"/>
+              </a:buClr>
+              <a:buSzPts val="1100"/>
+            </a:pPr>
+            <a:r>
+              <a:rPr lang="en-US" sz="1800" dirty="0"/>
+              <a:t>I am a financial consulting professional in the health insurance brokerage sector.</a:t>
+            </a:r>
+            <a:endParaRPr sz="1800" dirty="0"/>
+          </a:p>
+          <a:p>
+            <a:pPr marL="342900" indent="-342900">
+              <a:buClr>
+                <a:schemeClr val="dk1"/>
+              </a:buClr>
+              <a:buSzPts val="1100"/>
+            </a:pPr>
+            <a:r>
+              <a:rPr lang="en" sz="1800" dirty="0"/>
+              <a:t>You can find me here on </a:t>
+            </a:r>
+            <a:r>
+              <a:rPr lang="en-US" sz="1800" dirty="0">
+                <a:hlinkClick r:id="rId3"/>
+              </a:rPr>
+              <a:t>LinkedIn</a:t>
+            </a:r>
+            <a:endParaRPr sz="1800" b="1" dirty="0"/>
+          </a:p>
+        </p:txBody>
+      </p:sp>
+      <p:sp>
+        <p:nvSpPr>
+          <p:cNvPr id="178" name="Google Shape;178;p15"/>
+          <p:cNvSpPr txBox="1">
+            <a:spLocks noGrp="1"/>
+          </p:cNvSpPr>
+          <p:nvPr>
+            <p:ph type="sldNum" idx="12"/>
+          </p:nvPr>
+        </p:nvSpPr>
+        <p:spPr>
+          <a:xfrm>
+            <a:off x="0" y="4762400"/>
+            <a:ext cx="381000" cy="386400"/>
           </a:xfrm>
           <a:prstGeom prst="rect">
             <a:avLst/>
@@ -9585,7 +9274,7 @@
           </a:bodyPr>
           <a:lstStyle/>
           <a:p>
-            <a:pPr marL="0" lvl="0" indent="0" algn="l" rtl="0">
+            <a:pPr marL="0" lvl="0" indent="0" algn="ctr" rtl="0">
               <a:spcBef>
                 <a:spcPts val="0"/>
               </a:spcBef>
@@ -9594,19 +9283,52 @@
               </a:spcAft>
               <a:buNone/>
             </a:pPr>
-            <a:r>
-              <a:rPr lang="en" dirty="0"/>
-              <a:t>Hospital Costs vs. Quality of Care</a:t>
-            </a:r>
-            <a:endParaRPr dirty="0"/>
+            <a:fld id="{00000000-1234-1234-1234-123412341234}" type="slidenum">
+              <a:rPr lang="en"/>
+              <a:t>1</a:t>
+            </a:fld>
+            <a:endParaRPr/>
           </a:p>
         </p:txBody>
       </p:sp>
+      <p:pic>
+        <p:nvPicPr>
+          <p:cNvPr id="3" name="Picture 2">
+            <a:extLst>
+              <a:ext uri="{FF2B5EF4-FFF2-40B4-BE49-F238E27FC236}">
+                <a16:creationId xmlns:a16="http://schemas.microsoft.com/office/drawing/2014/main" id="{AA8107A8-37DC-6D4F-BD01-76831F0C33A0}"/>
+              </a:ext>
+            </a:extLst>
+          </p:cNvPr>
+          <p:cNvPicPr>
+            <a:picLocks noChangeAspect="1"/>
+          </p:cNvPicPr>
+          <p:nvPr/>
+        </p:nvPicPr>
+        <p:blipFill>
+          <a:blip r:embed="rId4"/>
+          <a:stretch>
+            <a:fillRect/>
+          </a:stretch>
+        </p:blipFill>
+        <p:spPr>
+          <a:xfrm>
+            <a:off x="4896740" y="709293"/>
+            <a:ext cx="3281584" cy="3640586"/>
+          </a:xfrm>
+          <a:prstGeom prst="rect">
+            <a:avLst/>
+          </a:prstGeom>
+        </p:spPr>
+      </p:pic>
     </p:spTree>
   </p:cSld>
   <p:clrMapOvr>
     <a:masterClrMapping/>
   </p:clrMapOvr>
+  <p:transition>
+    <p:fade thruBlk="1"/>
+  </p:transition>
 </p:sld>
 </file>
 
@@ -9722,7 +9444,7 @@
           <a:p>
             <a:r>
               <a:rPr lang="en" dirty="0"/>
-              <a:t>Average costs are associated with with entire </a:t>
+              <a:t>Average costs are associated with entire </a:t>
             </a:r>
             <a:r>
               <a:rPr lang="en" b="1" dirty="0">
@@ -10884,6 +10606,9 @@
   <p:clrMapOvr>
     <a:masterClrMapping/>
   </p:clrMapOvr>
+  <p:transition>
+    <p:fade thruBlk="1"/>
+  </p:transition>
 </p:sld>
 </file>
 
@@ -11560,887 +11285,6 @@
 <file path=ppt/slides/slide14.xml><?xml version="1.0" encoding="utf-8"?>
 <p:sld xmlns:a="http://schemas.openxmlformats.org/drawingml/2006/main" xmlns:r="http://schemas.openxmlformats.org/officeDocument/2006/relationships" xmlns:p="http://schemas.openxmlformats.org/presentationml/2006/main">
   <p:cSld>
-    <p:spTree>
-      <p:nvGrpSpPr>
-        <p:cNvPr id="1" name="Shape 350"/>
-        <p:cNvGrpSpPr/>
-        <p:nvPr/>
-      </p:nvGrpSpPr>
-      <p:grpSpPr>
-        <a:xfrm>
-          <a:off x="0" y="0"/>
-          <a:ext cx="0" cy="0"/>
-          <a:chOff x="0" y="0"/>
-          <a:chExt cx="0" cy="0"/>
-        </a:xfrm>
-      </p:grpSpPr>
-      <p:sp>
-        <p:nvSpPr>
-          <p:cNvPr id="357" name="Google Shape;357;p28"/>
-          <p:cNvSpPr txBox="1">
-            <a:spLocks noGrp="1"/>
-          </p:cNvSpPr>
-          <p:nvPr>
-            <p:ph type="sldNum" idx="12"/>
-          </p:nvPr>
-        </p:nvSpPr>
-        <p:spPr>
-          <a:xfrm>
-            <a:off x="0" y="4762400"/>
-            <a:ext cx="381000" cy="386400"/>
-          </a:xfrm>
-          <a:prstGeom prst="rect">
-            <a:avLst/>
-          </a:prstGeom>
-        </p:spPr>
-        <p:txBody>
-          <a:bodyPr spcFirstLastPara="1" wrap="square" lIns="0" tIns="0" rIns="0" bIns="0" anchor="ctr" anchorCtr="0">
-            <a:noAutofit/>
-          </a:bodyPr>
-          <a:lstStyle/>
-          <a:p>
-            <a:pPr marL="0" lvl="0" indent="0" algn="ctr" rtl="0">
-              <a:spcBef>
-                <a:spcPts val="0"/>
-              </a:spcBef>
-              <a:spcAft>
-                <a:spcPts val="0"/>
-              </a:spcAft>
-              <a:buNone/>
-            </a:pPr>
-            <a:fld id="{00000000-1234-1234-1234-123412341234}" type="slidenum">
-              <a:rPr lang="en"/>
-              <a:t>14</a:t>
-            </a:fld>
-            <a:endParaRPr/>
-          </a:p>
-        </p:txBody>
-      </p:sp>
-      <p:sp>
-        <p:nvSpPr>
-          <p:cNvPr id="25" name="Rectangle 24">
-            <a:extLst>
-              <a:ext uri="{FF2B5EF4-FFF2-40B4-BE49-F238E27FC236}">
-                <a16:creationId xmlns:a16="http://schemas.microsoft.com/office/drawing/2014/main" id="{0FADFF26-D2AB-9942-9D8F-7D7E2BEECB25}"/>
-              </a:ext>
-            </a:extLst>
-          </p:cNvPr>
-          <p:cNvSpPr/>
-          <p:nvPr/>
-        </p:nvSpPr>
-        <p:spPr>
-          <a:xfrm>
-            <a:off x="4123034" y="1020727"/>
-            <a:ext cx="964284" cy="3518880"/>
-          </a:xfrm>
-          <a:prstGeom prst="rect">
-            <a:avLst/>
-          </a:prstGeom>
-          <a:gradFill flip="none" rotWithShape="1">
-            <a:gsLst>
-              <a:gs pos="100000">
-                <a:srgbClr val="FF0000">
-                  <a:lumMod val="82000"/>
-                </a:srgbClr>
-              </a:gs>
-              <a:gs pos="50000">
-                <a:srgbClr val="FFFF00"/>
-              </a:gs>
-              <a:gs pos="0">
-                <a:srgbClr val="00B050">
-                  <a:lumMod val="69000"/>
-                </a:srgbClr>
-              </a:gs>
-            </a:gsLst>
-            <a:lin ang="5400000" scaled="0"/>
-            <a:tileRect/>
-          </a:gradFill>
-        </p:spPr>
-        <p:style>
-          <a:lnRef idx="2">
-            <a:schemeClr val="accent1">
-              <a:shade val="50000"/>
-            </a:schemeClr>
-          </a:lnRef>
-          <a:fillRef idx="1">
-            <a:schemeClr val="accent1"/>
-          </a:fillRef>
-          <a:effectRef idx="0">
-            <a:schemeClr val="accent1"/>
-          </a:effectRef>
-          <a:fontRef idx="minor">
-            <a:schemeClr val="lt1"/>
-          </a:fontRef>
-        </p:style>
-        <p:txBody>
-          <a:bodyPr rtlCol="0" anchor="ctr"/>
-          <a:lstStyle/>
-          <a:p>
-            <a:pPr algn="ctr"/>
-            <a:endParaRPr lang="en-US"/>
-          </a:p>
-        </p:txBody>
-      </p:sp>
-      <p:cxnSp>
-        <p:nvCxnSpPr>
-          <p:cNvPr id="26" name="Straight Connector 25">
-            <a:extLst>
-              <a:ext uri="{FF2B5EF4-FFF2-40B4-BE49-F238E27FC236}">
-                <a16:creationId xmlns:a16="http://schemas.microsoft.com/office/drawing/2014/main" id="{21C3770C-9945-854C-A4B8-5F434A79A2A5}"/>
-              </a:ext>
-            </a:extLst>
-          </p:cNvPr>
-          <p:cNvCxnSpPr>
-            <a:cxnSpLocks/>
-          </p:cNvCxnSpPr>
-          <p:nvPr/>
-        </p:nvCxnSpPr>
-        <p:spPr>
-          <a:xfrm>
-            <a:off x="3864573" y="1020727"/>
-            <a:ext cx="0" cy="3518880"/>
-          </a:xfrm>
-          <a:prstGeom prst="line">
-            <a:avLst/>
-          </a:prstGeom>
-          <a:ln w="19050">
-            <a:solidFill>
-              <a:srgbClr val="000000"/>
-            </a:solidFill>
-          </a:ln>
-        </p:spPr>
-        <p:style>
-          <a:lnRef idx="1">
-            <a:schemeClr val="accent1"/>
-          </a:lnRef>
-          <a:fillRef idx="0">
-            <a:schemeClr val="accent1"/>
-          </a:fillRef>
-          <a:effectRef idx="0">
-            <a:schemeClr val="accent1"/>
-          </a:effectRef>
-          <a:fontRef idx="minor">
-            <a:schemeClr val="tx1"/>
-          </a:fontRef>
-        </p:style>
-      </p:cxnSp>
-      <p:cxnSp>
-        <p:nvCxnSpPr>
-          <p:cNvPr id="27" name="Straight Connector 26">
-            <a:extLst>
-              <a:ext uri="{FF2B5EF4-FFF2-40B4-BE49-F238E27FC236}">
-                <a16:creationId xmlns:a16="http://schemas.microsoft.com/office/drawing/2014/main" id="{BF8056AB-B94E-4E44-AA8D-3B1FCC85374D}"/>
-              </a:ext>
-            </a:extLst>
-          </p:cNvPr>
-          <p:cNvCxnSpPr/>
-          <p:nvPr/>
-        </p:nvCxnSpPr>
-        <p:spPr>
-          <a:xfrm>
-            <a:off x="3742298" y="1020727"/>
-            <a:ext cx="244549" cy="0"/>
-          </a:xfrm>
-          <a:prstGeom prst="line">
-            <a:avLst/>
-          </a:prstGeom>
-          <a:ln w="19050">
-            <a:solidFill>
-              <a:srgbClr val="000000"/>
-            </a:solidFill>
-          </a:ln>
-        </p:spPr>
-        <p:style>
-          <a:lnRef idx="1">
-            <a:schemeClr val="accent1"/>
-          </a:lnRef>
-          <a:fillRef idx="0">
-            <a:schemeClr val="accent1"/>
-          </a:fillRef>
-          <a:effectRef idx="0">
-            <a:schemeClr val="accent1"/>
-          </a:effectRef>
-          <a:fontRef idx="minor">
-            <a:schemeClr val="tx1"/>
-          </a:fontRef>
-        </p:style>
-      </p:cxnSp>
-      <p:cxnSp>
-        <p:nvCxnSpPr>
-          <p:cNvPr id="28" name="Straight Connector 27">
-            <a:extLst>
-              <a:ext uri="{FF2B5EF4-FFF2-40B4-BE49-F238E27FC236}">
-                <a16:creationId xmlns:a16="http://schemas.microsoft.com/office/drawing/2014/main" id="{EC155BA8-95B9-4B4F-8ED4-C0C2D39B113A}"/>
-              </a:ext>
-            </a:extLst>
-          </p:cNvPr>
-          <p:cNvCxnSpPr>
-            <a:cxnSpLocks/>
-          </p:cNvCxnSpPr>
-          <p:nvPr/>
-        </p:nvCxnSpPr>
-        <p:spPr>
-          <a:xfrm>
-            <a:off x="3742298" y="2204485"/>
-            <a:ext cx="1522796" cy="0"/>
-          </a:xfrm>
-          <a:prstGeom prst="line">
-            <a:avLst/>
-          </a:prstGeom>
-          <a:ln w="19050">
-            <a:solidFill>
-              <a:srgbClr val="000000"/>
-            </a:solidFill>
-            <a:prstDash val="lgDash"/>
-          </a:ln>
-        </p:spPr>
-        <p:style>
-          <a:lnRef idx="1">
-            <a:schemeClr val="accent1"/>
-          </a:lnRef>
-          <a:fillRef idx="0">
-            <a:schemeClr val="accent1"/>
-          </a:fillRef>
-          <a:effectRef idx="0">
-            <a:schemeClr val="accent1"/>
-          </a:effectRef>
-          <a:fontRef idx="minor">
-            <a:schemeClr val="tx1"/>
-          </a:fontRef>
-        </p:style>
-      </p:cxnSp>
-      <p:cxnSp>
-        <p:nvCxnSpPr>
-          <p:cNvPr id="29" name="Straight Connector 28">
-            <a:extLst>
-              <a:ext uri="{FF2B5EF4-FFF2-40B4-BE49-F238E27FC236}">
-                <a16:creationId xmlns:a16="http://schemas.microsoft.com/office/drawing/2014/main" id="{3A452A6A-2237-044F-B9D6-A4C0150BC576}"/>
-              </a:ext>
-            </a:extLst>
-          </p:cNvPr>
-          <p:cNvCxnSpPr>
-            <a:cxnSpLocks/>
-          </p:cNvCxnSpPr>
-          <p:nvPr/>
-        </p:nvCxnSpPr>
-        <p:spPr>
-          <a:xfrm>
-            <a:off x="3742298" y="3366979"/>
-            <a:ext cx="1522796" cy="0"/>
-          </a:xfrm>
-          <a:prstGeom prst="line">
-            <a:avLst/>
-          </a:prstGeom>
-          <a:ln w="19050">
-            <a:solidFill>
-              <a:srgbClr val="000000"/>
-            </a:solidFill>
-            <a:prstDash val="lgDash"/>
-          </a:ln>
-        </p:spPr>
-        <p:style>
-          <a:lnRef idx="1">
-            <a:schemeClr val="accent1"/>
-          </a:lnRef>
-          <a:fillRef idx="0">
-            <a:schemeClr val="accent1"/>
-          </a:fillRef>
-          <a:effectRef idx="0">
-            <a:schemeClr val="accent1"/>
-          </a:effectRef>
-          <a:fontRef idx="minor">
-            <a:schemeClr val="tx1"/>
-          </a:fontRef>
-        </p:style>
-      </p:cxnSp>
-      <p:cxnSp>
-        <p:nvCxnSpPr>
-          <p:cNvPr id="30" name="Straight Connector 29">
-            <a:extLst>
-              <a:ext uri="{FF2B5EF4-FFF2-40B4-BE49-F238E27FC236}">
-                <a16:creationId xmlns:a16="http://schemas.microsoft.com/office/drawing/2014/main" id="{637E39F4-F0E3-824F-98FB-3C626C62A82E}"/>
-              </a:ext>
-            </a:extLst>
-          </p:cNvPr>
-          <p:cNvCxnSpPr/>
-          <p:nvPr/>
-        </p:nvCxnSpPr>
-        <p:spPr>
-          <a:xfrm>
-            <a:off x="3742298" y="4539607"/>
-            <a:ext cx="244549" cy="0"/>
-          </a:xfrm>
-          <a:prstGeom prst="line">
-            <a:avLst/>
-          </a:prstGeom>
-          <a:ln w="19050">
-            <a:solidFill>
-              <a:srgbClr val="000000"/>
-            </a:solidFill>
-          </a:ln>
-        </p:spPr>
-        <p:style>
-          <a:lnRef idx="1">
-            <a:schemeClr val="accent1"/>
-          </a:lnRef>
-          <a:fillRef idx="0">
-            <a:schemeClr val="accent1"/>
-          </a:fillRef>
-          <a:effectRef idx="0">
-            <a:schemeClr val="accent1"/>
-          </a:effectRef>
-          <a:fontRef idx="minor">
-            <a:schemeClr val="tx1"/>
-          </a:fontRef>
-        </p:style>
-      </p:cxnSp>
-      <p:sp>
-        <p:nvSpPr>
-          <p:cNvPr id="31" name="TextBox 30">
-            <a:extLst>
-              <a:ext uri="{FF2B5EF4-FFF2-40B4-BE49-F238E27FC236}">
-                <a16:creationId xmlns:a16="http://schemas.microsoft.com/office/drawing/2014/main" id="{01777CF1-9FDE-934C-8764-51574C1EBCBE}"/>
-              </a:ext>
-            </a:extLst>
-          </p:cNvPr>
-          <p:cNvSpPr txBox="1"/>
-          <p:nvPr/>
-        </p:nvSpPr>
-        <p:spPr>
-          <a:xfrm>
-            <a:off x="1840609" y="1286125"/>
-            <a:ext cx="1859519" cy="523220"/>
-          </a:xfrm>
-          <a:prstGeom prst="rect">
-            <a:avLst/>
-          </a:prstGeom>
-          <a:noFill/>
-        </p:spPr>
-        <p:txBody>
-          <a:bodyPr wrap="square" rtlCol="0">
-            <a:spAutoFit/>
-          </a:bodyPr>
-          <a:lstStyle/>
-          <a:p>
-            <a:r>
-              <a:rPr lang="en-US" dirty="0"/>
-              <a:t>Better Complication/ Mortality Rate</a:t>
-            </a:r>
-          </a:p>
-        </p:txBody>
-      </p:sp>
-      <p:cxnSp>
-        <p:nvCxnSpPr>
-          <p:cNvPr id="34" name="Straight Connector 33">
-            <a:extLst>
-              <a:ext uri="{FF2B5EF4-FFF2-40B4-BE49-F238E27FC236}">
-                <a16:creationId xmlns:a16="http://schemas.microsoft.com/office/drawing/2014/main" id="{74D10981-DB74-DD40-8288-59BC0E4F1C49}"/>
-              </a:ext>
-            </a:extLst>
-          </p:cNvPr>
-          <p:cNvCxnSpPr>
-            <a:cxnSpLocks/>
-          </p:cNvCxnSpPr>
-          <p:nvPr/>
-        </p:nvCxnSpPr>
-        <p:spPr>
-          <a:xfrm>
-            <a:off x="5416207" y="1020727"/>
-            <a:ext cx="10368" cy="1183758"/>
-          </a:xfrm>
-          <a:prstGeom prst="line">
-            <a:avLst/>
-          </a:prstGeom>
-          <a:ln w="9525">
-            <a:solidFill>
-              <a:srgbClr val="000000"/>
-            </a:solidFill>
-          </a:ln>
-        </p:spPr>
-        <p:style>
-          <a:lnRef idx="1">
-            <a:schemeClr val="accent1"/>
-          </a:lnRef>
-          <a:fillRef idx="0">
-            <a:schemeClr val="accent1"/>
-          </a:fillRef>
-          <a:effectRef idx="0">
-            <a:schemeClr val="accent1"/>
-          </a:effectRef>
-          <a:fontRef idx="minor">
-            <a:schemeClr val="tx1"/>
-          </a:fontRef>
-        </p:style>
-      </p:cxnSp>
-      <p:cxnSp>
-        <p:nvCxnSpPr>
-          <p:cNvPr id="35" name="Straight Connector 34">
-            <a:extLst>
-              <a:ext uri="{FF2B5EF4-FFF2-40B4-BE49-F238E27FC236}">
-                <a16:creationId xmlns:a16="http://schemas.microsoft.com/office/drawing/2014/main" id="{7E6B0CB1-1A29-944D-8BDA-25EDEDBE8E70}"/>
-              </a:ext>
-            </a:extLst>
-          </p:cNvPr>
-          <p:cNvCxnSpPr>
-            <a:cxnSpLocks/>
-          </p:cNvCxnSpPr>
-          <p:nvPr/>
-        </p:nvCxnSpPr>
-        <p:spPr>
-          <a:xfrm>
-            <a:off x="5345891" y="1020727"/>
-            <a:ext cx="122274" cy="0"/>
-          </a:xfrm>
-          <a:prstGeom prst="line">
-            <a:avLst/>
-          </a:prstGeom>
-          <a:ln w="9525">
-            <a:solidFill>
-              <a:srgbClr val="000000"/>
-            </a:solidFill>
-          </a:ln>
-        </p:spPr>
-        <p:style>
-          <a:lnRef idx="1">
-            <a:schemeClr val="accent1"/>
-          </a:lnRef>
-          <a:fillRef idx="0">
-            <a:schemeClr val="accent1"/>
-          </a:fillRef>
-          <a:effectRef idx="0">
-            <a:schemeClr val="accent1"/>
-          </a:effectRef>
-          <a:fontRef idx="minor">
-            <a:schemeClr val="tx1"/>
-          </a:fontRef>
-        </p:style>
-      </p:cxnSp>
-      <p:cxnSp>
-        <p:nvCxnSpPr>
-          <p:cNvPr id="36" name="Straight Connector 35">
-            <a:extLst>
-              <a:ext uri="{FF2B5EF4-FFF2-40B4-BE49-F238E27FC236}">
-                <a16:creationId xmlns:a16="http://schemas.microsoft.com/office/drawing/2014/main" id="{41B07CF9-1F46-1F42-BD93-3B21FADD57F8}"/>
-              </a:ext>
-            </a:extLst>
-          </p:cNvPr>
-          <p:cNvCxnSpPr>
-            <a:cxnSpLocks/>
-          </p:cNvCxnSpPr>
-          <p:nvPr/>
-        </p:nvCxnSpPr>
-        <p:spPr>
-          <a:xfrm>
-            <a:off x="5345891" y="1391131"/>
-            <a:ext cx="131453" cy="0"/>
-          </a:xfrm>
-          <a:prstGeom prst="line">
-            <a:avLst/>
-          </a:prstGeom>
-          <a:ln w="9525">
-            <a:solidFill>
-              <a:srgbClr val="000000"/>
-            </a:solidFill>
-          </a:ln>
-        </p:spPr>
-        <p:style>
-          <a:lnRef idx="1">
-            <a:schemeClr val="accent1"/>
-          </a:lnRef>
-          <a:fillRef idx="0">
-            <a:schemeClr val="accent1"/>
-          </a:fillRef>
-          <a:effectRef idx="0">
-            <a:schemeClr val="accent1"/>
-          </a:effectRef>
-          <a:fontRef idx="minor">
-            <a:schemeClr val="tx1"/>
-          </a:fontRef>
-        </p:style>
-      </p:cxnSp>
-      <p:cxnSp>
-        <p:nvCxnSpPr>
-          <p:cNvPr id="37" name="Straight Connector 36">
-            <a:extLst>
-              <a:ext uri="{FF2B5EF4-FFF2-40B4-BE49-F238E27FC236}">
-                <a16:creationId xmlns:a16="http://schemas.microsoft.com/office/drawing/2014/main" id="{04CE5C65-9AC8-3D48-8C54-054F4F6F3466}"/>
-              </a:ext>
-            </a:extLst>
-          </p:cNvPr>
-          <p:cNvCxnSpPr>
-            <a:cxnSpLocks/>
-          </p:cNvCxnSpPr>
-          <p:nvPr/>
-        </p:nvCxnSpPr>
-        <p:spPr>
-          <a:xfrm>
-            <a:off x="5345891" y="1809345"/>
-            <a:ext cx="131453" cy="0"/>
-          </a:xfrm>
-          <a:prstGeom prst="line">
-            <a:avLst/>
-          </a:prstGeom>
-          <a:ln w="9525">
-            <a:solidFill>
-              <a:srgbClr val="000000"/>
-            </a:solidFill>
-          </a:ln>
-        </p:spPr>
-        <p:style>
-          <a:lnRef idx="1">
-            <a:schemeClr val="accent1"/>
-          </a:lnRef>
-          <a:fillRef idx="0">
-            <a:schemeClr val="accent1"/>
-          </a:fillRef>
-          <a:effectRef idx="0">
-            <a:schemeClr val="accent1"/>
-          </a:effectRef>
-          <a:fontRef idx="minor">
-            <a:schemeClr val="tx1"/>
-          </a:fontRef>
-        </p:style>
-      </p:cxnSp>
-      <p:cxnSp>
-        <p:nvCxnSpPr>
-          <p:cNvPr id="38" name="Straight Connector 37">
-            <a:extLst>
-              <a:ext uri="{FF2B5EF4-FFF2-40B4-BE49-F238E27FC236}">
-                <a16:creationId xmlns:a16="http://schemas.microsoft.com/office/drawing/2014/main" id="{A5D9A0FD-AEF0-6044-B871-6875BA69D697}"/>
-              </a:ext>
-            </a:extLst>
-          </p:cNvPr>
-          <p:cNvCxnSpPr>
-            <a:cxnSpLocks/>
-          </p:cNvCxnSpPr>
-          <p:nvPr/>
-        </p:nvCxnSpPr>
-        <p:spPr>
-          <a:xfrm>
-            <a:off x="5345891" y="2206967"/>
-            <a:ext cx="131453" cy="0"/>
-          </a:xfrm>
-          <a:prstGeom prst="line">
-            <a:avLst/>
-          </a:prstGeom>
-          <a:ln w="9525">
-            <a:solidFill>
-              <a:srgbClr val="000000"/>
-            </a:solidFill>
-          </a:ln>
-        </p:spPr>
-        <p:style>
-          <a:lnRef idx="1">
-            <a:schemeClr val="accent1"/>
-          </a:lnRef>
-          <a:fillRef idx="0">
-            <a:schemeClr val="accent1"/>
-          </a:fillRef>
-          <a:effectRef idx="0">
-            <a:schemeClr val="accent1"/>
-          </a:effectRef>
-          <a:fontRef idx="minor">
-            <a:schemeClr val="tx1"/>
-          </a:fontRef>
-        </p:style>
-      </p:cxnSp>
-      <p:sp>
-        <p:nvSpPr>
-          <p:cNvPr id="39" name="TextBox 38">
-            <a:extLst>
-              <a:ext uri="{FF2B5EF4-FFF2-40B4-BE49-F238E27FC236}">
-                <a16:creationId xmlns:a16="http://schemas.microsoft.com/office/drawing/2014/main" id="{BF6BC058-0BFF-8B4B-B95E-A93B9C5460F3}"/>
-              </a:ext>
-            </a:extLst>
-          </p:cNvPr>
-          <p:cNvSpPr txBox="1"/>
-          <p:nvPr/>
-        </p:nvSpPr>
-        <p:spPr>
-          <a:xfrm>
-            <a:off x="5426575" y="1104616"/>
-            <a:ext cx="1686680" cy="246221"/>
-          </a:xfrm>
-          <a:prstGeom prst="rect">
-            <a:avLst/>
-          </a:prstGeom>
-          <a:noFill/>
-        </p:spPr>
-        <p:txBody>
-          <a:bodyPr wrap="none" rtlCol="0">
-            <a:spAutoFit/>
-          </a:bodyPr>
-          <a:lstStyle/>
-          <a:p>
-            <a:r>
-              <a:rPr lang="en-US" sz="1000" dirty="0"/>
-              <a:t>Lower than Average Costs</a:t>
-            </a:r>
-          </a:p>
-        </p:txBody>
-      </p:sp>
-      <p:sp>
-        <p:nvSpPr>
-          <p:cNvPr id="40" name="TextBox 39">
-            <a:extLst>
-              <a:ext uri="{FF2B5EF4-FFF2-40B4-BE49-F238E27FC236}">
-                <a16:creationId xmlns:a16="http://schemas.microsoft.com/office/drawing/2014/main" id="{EF99AA50-A4BD-A24D-8365-429051E79B59}"/>
-              </a:ext>
-            </a:extLst>
-          </p:cNvPr>
-          <p:cNvSpPr txBox="1"/>
-          <p:nvPr/>
-        </p:nvSpPr>
-        <p:spPr>
-          <a:xfrm>
-            <a:off x="5453598" y="1502961"/>
-            <a:ext cx="1021433" cy="246221"/>
-          </a:xfrm>
-          <a:prstGeom prst="rect">
-            <a:avLst/>
-          </a:prstGeom>
-          <a:noFill/>
-        </p:spPr>
-        <p:txBody>
-          <a:bodyPr wrap="none" rtlCol="0">
-            <a:spAutoFit/>
-          </a:bodyPr>
-          <a:lstStyle/>
-          <a:p>
-            <a:r>
-              <a:rPr lang="en-US" sz="1000" dirty="0"/>
-              <a:t>Average Costs</a:t>
-            </a:r>
-          </a:p>
-        </p:txBody>
-      </p:sp>
-      <p:sp>
-        <p:nvSpPr>
-          <p:cNvPr id="41" name="TextBox 40">
-            <a:extLst>
-              <a:ext uri="{FF2B5EF4-FFF2-40B4-BE49-F238E27FC236}">
-                <a16:creationId xmlns:a16="http://schemas.microsoft.com/office/drawing/2014/main" id="{AAC23942-A796-234B-8219-6A4AE82A9985}"/>
-              </a:ext>
-            </a:extLst>
-          </p:cNvPr>
-          <p:cNvSpPr txBox="1"/>
-          <p:nvPr/>
-        </p:nvSpPr>
-        <p:spPr>
-          <a:xfrm>
-            <a:off x="5453598" y="1901307"/>
-            <a:ext cx="1715534" cy="246221"/>
-          </a:xfrm>
-          <a:prstGeom prst="rect">
-            <a:avLst/>
-          </a:prstGeom>
-          <a:noFill/>
-        </p:spPr>
-        <p:txBody>
-          <a:bodyPr wrap="none" rtlCol="0">
-            <a:spAutoFit/>
-          </a:bodyPr>
-          <a:lstStyle/>
-          <a:p>
-            <a:r>
-              <a:rPr lang="en-US" sz="1000" dirty="0"/>
-              <a:t>Higher than Average Costs</a:t>
-            </a:r>
-          </a:p>
-        </p:txBody>
-      </p:sp>
-      <p:sp>
-        <p:nvSpPr>
-          <p:cNvPr id="3" name="TextBox 2">
-            <a:extLst>
-              <a:ext uri="{FF2B5EF4-FFF2-40B4-BE49-F238E27FC236}">
-                <a16:creationId xmlns:a16="http://schemas.microsoft.com/office/drawing/2014/main" id="{4D5B5C8C-90B8-9342-B09A-493F24311045}"/>
-              </a:ext>
-            </a:extLst>
-          </p:cNvPr>
-          <p:cNvSpPr txBox="1"/>
-          <p:nvPr/>
-        </p:nvSpPr>
-        <p:spPr>
-          <a:xfrm>
-            <a:off x="4280464" y="631748"/>
-            <a:ext cx="635395" cy="400110"/>
-          </a:xfrm>
-          <a:prstGeom prst="rect">
-            <a:avLst/>
-          </a:prstGeom>
-          <a:noFill/>
-        </p:spPr>
-        <p:txBody>
-          <a:bodyPr wrap="square" rtlCol="0">
-            <a:spAutoFit/>
-          </a:bodyPr>
-          <a:lstStyle/>
-          <a:p>
-            <a:pPr algn="ctr"/>
-            <a:r>
-              <a:rPr lang="en-US" sz="2000" dirty="0"/>
-              <a:t>9.0</a:t>
-            </a:r>
-          </a:p>
-        </p:txBody>
-      </p:sp>
-      <p:sp>
-        <p:nvSpPr>
-          <p:cNvPr id="43" name="TextBox 42">
-            <a:extLst>
-              <a:ext uri="{FF2B5EF4-FFF2-40B4-BE49-F238E27FC236}">
-                <a16:creationId xmlns:a16="http://schemas.microsoft.com/office/drawing/2014/main" id="{A0037C5F-3578-F648-A98C-E7D62720D74F}"/>
-              </a:ext>
-            </a:extLst>
-          </p:cNvPr>
-          <p:cNvSpPr txBox="1"/>
-          <p:nvPr/>
-        </p:nvSpPr>
-        <p:spPr>
-          <a:xfrm>
-            <a:off x="4280464" y="4525050"/>
-            <a:ext cx="649421" cy="400110"/>
-          </a:xfrm>
-          <a:prstGeom prst="rect">
-            <a:avLst/>
-          </a:prstGeom>
-          <a:noFill/>
-        </p:spPr>
-        <p:txBody>
-          <a:bodyPr wrap="square" rtlCol="0">
-            <a:spAutoFit/>
-          </a:bodyPr>
-          <a:lstStyle/>
-          <a:p>
-            <a:pPr algn="ctr"/>
-            <a:r>
-              <a:rPr lang="en-US" sz="2000" dirty="0"/>
-              <a:t>1.0</a:t>
-            </a:r>
-          </a:p>
-        </p:txBody>
-      </p:sp>
-      <p:sp>
-        <p:nvSpPr>
-          <p:cNvPr id="44" name="TextBox 43">
-            <a:extLst>
-              <a:ext uri="{FF2B5EF4-FFF2-40B4-BE49-F238E27FC236}">
-                <a16:creationId xmlns:a16="http://schemas.microsoft.com/office/drawing/2014/main" id="{4D042FCB-38CE-974C-A260-7CBF4FE0C2F1}"/>
-              </a:ext>
-            </a:extLst>
-          </p:cNvPr>
-          <p:cNvSpPr txBox="1"/>
-          <p:nvPr/>
-        </p:nvSpPr>
-        <p:spPr>
-          <a:xfrm>
-            <a:off x="1827277" y="2518557"/>
-            <a:ext cx="2037183" cy="523220"/>
-          </a:xfrm>
-          <a:prstGeom prst="rect">
-            <a:avLst/>
-          </a:prstGeom>
-          <a:noFill/>
-        </p:spPr>
-        <p:txBody>
-          <a:bodyPr wrap="square" rtlCol="0">
-            <a:spAutoFit/>
-          </a:bodyPr>
-          <a:lstStyle/>
-          <a:p>
-            <a:r>
-              <a:rPr lang="en-US" dirty="0"/>
-              <a:t>Average Complication/ Mortality Rate</a:t>
-            </a:r>
-          </a:p>
-        </p:txBody>
-      </p:sp>
-      <p:sp>
-        <p:nvSpPr>
-          <p:cNvPr id="45" name="TextBox 44">
-            <a:extLst>
-              <a:ext uri="{FF2B5EF4-FFF2-40B4-BE49-F238E27FC236}">
-                <a16:creationId xmlns:a16="http://schemas.microsoft.com/office/drawing/2014/main" id="{7D0E2B75-60C4-4F41-B21B-0C76DE82CAC4}"/>
-              </a:ext>
-            </a:extLst>
-          </p:cNvPr>
-          <p:cNvSpPr txBox="1"/>
-          <p:nvPr/>
-        </p:nvSpPr>
-        <p:spPr>
-          <a:xfrm>
-            <a:off x="1827278" y="3642371"/>
-            <a:ext cx="1831934" cy="523220"/>
-          </a:xfrm>
-          <a:prstGeom prst="rect">
-            <a:avLst/>
-          </a:prstGeom>
-          <a:noFill/>
-        </p:spPr>
-        <p:txBody>
-          <a:bodyPr wrap="square" rtlCol="0">
-            <a:spAutoFit/>
-          </a:bodyPr>
-          <a:lstStyle/>
-          <a:p>
-            <a:r>
-              <a:rPr lang="en-US" dirty="0"/>
-              <a:t>Worse Complication/ Mortality Rate</a:t>
-            </a:r>
-          </a:p>
-        </p:txBody>
-      </p:sp>
-      <p:sp>
-        <p:nvSpPr>
-          <p:cNvPr id="4" name="TextBox 3">
-            <a:extLst>
-              <a:ext uri="{FF2B5EF4-FFF2-40B4-BE49-F238E27FC236}">
-                <a16:creationId xmlns:a16="http://schemas.microsoft.com/office/drawing/2014/main" id="{C18267C8-90BB-1449-A410-8D9C02B3E1F3}"/>
-              </a:ext>
-            </a:extLst>
-          </p:cNvPr>
-          <p:cNvSpPr txBox="1"/>
-          <p:nvPr/>
-        </p:nvSpPr>
-        <p:spPr>
-          <a:xfrm>
-            <a:off x="461988" y="157711"/>
-            <a:ext cx="6147391" cy="307777"/>
-          </a:xfrm>
-          <a:prstGeom prst="rect">
-            <a:avLst/>
-          </a:prstGeom>
-          <a:noFill/>
-        </p:spPr>
-        <p:txBody>
-          <a:bodyPr wrap="square" rtlCol="0">
-            <a:spAutoFit/>
-          </a:bodyPr>
-          <a:lstStyle/>
-          <a:p>
-            <a:r>
-              <a:rPr lang="en-US" b="1" dirty="0">
-                <a:solidFill>
-                  <a:schemeClr val="bg1"/>
-                </a:solidFill>
-              </a:rPr>
-              <a:t>Scoring Scale Used for Hospital Recommendation Map</a:t>
-            </a:r>
-          </a:p>
-        </p:txBody>
-      </p:sp>
-    </p:spTree>
-  </p:cSld>
-  <p:clrMapOvr>
-    <a:masterClrMapping/>
-  </p:clrMapOvr>
-</p:sld>
-</file>
-
-<file path=ppt/slides/slide15.xml><?xml version="1.0" encoding="utf-8"?>
-<p:sld xmlns:a="http://schemas.openxmlformats.org/drawingml/2006/main" xmlns:r="http://schemas.openxmlformats.org/officeDocument/2006/relationships" xmlns:p="http://schemas.openxmlformats.org/presentationml/2006/main">
-  <p:cSld>
     <p:bg>
       <p:bgPr>
         <a:solidFill>
@@ -12541,7 +11385,7 @@
             </a:pPr>
             <a:fld id="{00000000-1234-1234-1234-123412341234}" type="slidenum">
               <a:rPr lang="en"/>
-              <a:t>15</a:t>
+              <a:t>14</a:t>
             </a:fld>
             <a:endParaRPr/>
           </a:p>
@@ -12555,7 +11399,7 @@
 </p:sld>
 </file>
 
-<file path=ppt/slides/slide16.xml><?xml version="1.0" encoding="utf-8"?>
+<file path=ppt/slides/slide15.xml><?xml version="1.0" encoding="utf-8"?>
 <p:sld xmlns:a="http://schemas.openxmlformats.org/drawingml/2006/main" xmlns:r="http://schemas.openxmlformats.org/officeDocument/2006/relationships" xmlns:p="http://schemas.openxmlformats.org/presentationml/2006/main">
   <p:cSld>
     <p:spTree>
@@ -12680,7 +11524,7 @@
 </p:sld>
 </file>
 
-<file path=ppt/slides/slide17.xml><?xml version="1.0" encoding="utf-8"?>
+<file path=ppt/slides/slide16.xml><?xml version="1.0" encoding="utf-8"?>
 <p:sld xmlns:a="http://schemas.openxmlformats.org/drawingml/2006/main" xmlns:r="http://schemas.openxmlformats.org/officeDocument/2006/relationships" xmlns:p="http://schemas.openxmlformats.org/presentationml/2006/main">
   <p:cSld>
     <p:spTree>
@@ -12766,11 +11610,11 @@
           <a:p>
             <a:pPr lvl="0"/>
             <a:r>
-              <a:rPr lang="en" dirty="0"/>
+              <a:rPr lang="en" sz="1900" dirty="0"/>
               <a:t>In most cases, at a minimum, there is </a:t>
             </a:r>
             <a:r>
-              <a:rPr lang="en" b="1" dirty="0">
+              <a:rPr lang="en" sz="1900" b="1" dirty="0">
                 <a:solidFill>
                   <a:srgbClr val="0070C0"/>
                 </a:solidFill>
@@ -12778,7 +11622,7 @@
               <a:t>little-to-no correlation</a:t>
             </a:r>
             <a:r>
-              <a:rPr lang="en" dirty="0">
+              <a:rPr lang="en" sz="1900" dirty="0">
                 <a:solidFill>
                   <a:srgbClr val="0070C0"/>
                 </a:solidFill>
@@ -12786,32 +11630,52 @@
               <a:t> </a:t>
             </a:r>
             <a:r>
-              <a:rPr lang="en" dirty="0"/>
-              <a:t>between cost and quality of care.</a:t>
+              <a:rPr lang="en" sz="1900" dirty="0"/>
+              <a:t>between cost and quality of care.  In other words, spending more for a medical procedure does </a:t>
+            </a:r>
+            <a:r>
+              <a:rPr lang="en" sz="1900" b="1" dirty="0">
+                <a:solidFill>
+                  <a:srgbClr val="0070C0"/>
+                </a:solidFill>
+              </a:rPr>
+              <a:t>NOT</a:t>
+            </a:r>
+            <a:r>
+              <a:rPr lang="en" sz="1900" dirty="0"/>
+              <a:t> guarantee a higher quality of care.</a:t>
             </a:r>
           </a:p>
           <a:p>
             <a:pPr marL="76200" lvl="0" indent="0">
               <a:buNone/>
             </a:pPr>
-            <a:endParaRPr lang="en" dirty="0"/>
+            <a:endParaRPr lang="en" sz="1900" dirty="0"/>
           </a:p>
           <a:p>
             <a:pPr lvl="0"/>
             <a:r>
-              <a:rPr lang="en" dirty="0"/>
+              <a:rPr lang="en" sz="1900" dirty="0"/>
               <a:t>For conditions with a longer episode of care (</a:t>
             </a:r>
             <a:r>
-              <a:rPr lang="en" dirty="0" err="1"/>
+              <a:rPr lang="en" sz="1900" dirty="0" err="1"/>
               <a:t>ie</a:t>
             </a:r>
             <a:r>
-              <a:rPr lang="en" dirty="0"/>
-              <a:t>: Hip/Knee replacement), higher costs actually translate to a </a:t>
+              <a:rPr lang="en" sz="1900" dirty="0"/>
+              <a:t>: Hip/Knee replacement), </a:t>
             </a:r>
             <a:r>
-              <a:rPr lang="en" b="1" dirty="0">
+              <a:rPr lang="en" sz="1900"/>
+              <a:t>higher costs over time </a:t>
+            </a:r>
+            <a:r>
+              <a:rPr lang="en" sz="1900" dirty="0"/>
+              <a:t>actually translate to a </a:t>
+            </a:r>
+            <a:r>
+              <a:rPr lang="en" sz="1900" b="1" dirty="0">
                 <a:solidFill>
                   <a:srgbClr val="0070C0"/>
                 </a:solidFill>
@@ -12819,7 +11683,7 @@
               <a:t>lower</a:t>
             </a:r>
             <a:r>
-              <a:rPr lang="en" dirty="0"/>
+              <a:rPr lang="en" sz="1900" dirty="0"/>
               <a:t> quality of care, on average.</a:t>
             </a:r>
           </a:p>
@@ -12827,14 +11691,14 @@
             <a:pPr marL="76200" lvl="0" indent="0">
               <a:buNone/>
             </a:pPr>
-            <a:endParaRPr lang="en" dirty="0"/>
+            <a:endParaRPr lang="en" sz="1900" dirty="0"/>
           </a:p>
           <a:p>
             <a:r>
-              <a:rPr lang="en" dirty="0"/>
-              <a:t>Higher quality facilities are more efficient in providing care, yielding lower costs overall</a:t>
+              <a:rPr lang="en" sz="1900" dirty="0"/>
+              <a:t>Higher quality facilities are more efficient in providing care, yielding lower costs overall.</a:t>
             </a:r>
-            <a:endParaRPr lang="en" b="1" dirty="0"/>
+            <a:endParaRPr lang="en" sz="1900" b="1" dirty="0"/>
           </a:p>
           <a:p>
             <a:pPr lvl="0"/>
@@ -12884,7 +11748,7 @@
             </a:pPr>
             <a:fld id="{00000000-1234-1234-1234-123412341234}" type="slidenum">
               <a:rPr lang="en"/>
-              <a:t>17</a:t>
+              <a:t>16</a:t>
             </a:fld>
             <a:endParaRPr/>
           </a:p>
@@ -13234,7 +12098,7 @@
 </p:sld>
 </file>
 
-<file path=ppt/slides/slide18.xml><?xml version="1.0" encoding="utf-8"?>
+<file path=ppt/slides/slide17.xml><?xml version="1.0" encoding="utf-8"?>
 <p:sld xmlns:a="http://schemas.openxmlformats.org/drawingml/2006/main" xmlns:r="http://schemas.openxmlformats.org/officeDocument/2006/relationships" xmlns:p="http://schemas.openxmlformats.org/presentationml/2006/main">
   <p:cSld>
     <p:spTree>
@@ -13287,7 +12151,7 @@
             </a:pPr>
             <a:r>
               <a:rPr lang="en" dirty="0"/>
-              <a:t>Data Limitations</a:t>
+              <a:t>Next Steps</a:t>
             </a:r>
             <a:endParaRPr dirty="0"/>
           </a:p>
@@ -13305,8 +12169,8 @@
         </p:nvSpPr>
         <p:spPr>
           <a:xfrm>
-            <a:off x="614974" y="1310850"/>
-            <a:ext cx="7072365" cy="3669061"/>
+            <a:off x="614975" y="1479739"/>
+            <a:ext cx="6757800" cy="3669061"/>
           </a:xfrm>
           <a:prstGeom prst="rect">
             <a:avLst/>
@@ -13321,7 +12185,7 @@
             <a:pPr lvl="0"/>
             <a:r>
               <a:rPr lang="en" sz="1800" dirty="0"/>
-              <a:t>The costs for only these 4 medical conditions were present, it would have been ideal to have more conditions to observe correlations for, preferably those with longer episodes of care.</a:t>
+              <a:t>Locate data for additional conditions, and for other types of facilities (outpatient, urgent care, etc.)</a:t>
             </a:r>
           </a:p>
           <a:p>
@@ -13334,15 +12198,7 @@
             <a:pPr lvl="0"/>
             <a:r>
               <a:rPr lang="en" sz="1800" dirty="0"/>
-              <a:t>Many hospitals are either too small to report on cost/quality data, or just do not participate in the Medicare scoring program entirely.  These null records were om</a:t>
-            </a:r>
-            <a:r>
-              <a:rPr lang="en-US" sz="1800" dirty="0"/>
-              <a:t>it</a:t>
-            </a:r>
-            <a:r>
-              <a:rPr lang="en" sz="1800" dirty="0"/>
-              <a:t>ted from the map.</a:t>
+              <a:t>Utilize data for other types of outcome measurements (aside from just complication / mortality rates).</a:t>
             </a:r>
           </a:p>
           <a:p>
@@ -13354,12 +12210,16 @@
           <a:p>
             <a:r>
               <a:rPr lang="en" sz="1800" dirty="0"/>
-              <a:t>In order to plot points on the map, the hospital addresses required geocoding within Python to obtain coordinate values.  Some hospitals could not be located with the geocoding method (roughly 1,000 out of 18,000 records)</a:t>
+              <a:t>Some health tech companies specialize in this type of work, steering consumers to higher-quality providers and providing more </a:t>
             </a:r>
-          </a:p>
-          <a:p>
-            <a:pPr lvl="0"/>
-            <a:endParaRPr lang="en" dirty="0"/>
+            <a:r>
+              <a:rPr lang="en-US" sz="1800" dirty="0"/>
+              <a:t>transparency </a:t>
+            </a:r>
+            <a:r>
+              <a:rPr lang="en" sz="1800" dirty="0"/>
+              <a:t>for the costs of various procedures.</a:t>
+            </a:r>
           </a:p>
           <a:p>
             <a:pPr marL="76200" lvl="0" indent="0">
@@ -13405,7 +12265,7 @@
             </a:pPr>
             <a:fld id="{00000000-1234-1234-1234-123412341234}" type="slidenum">
               <a:rPr lang="en"/>
-              <a:t>18</a:t>
+              <a:t>17</a:t>
             </a:fld>
             <a:endParaRPr/>
           </a:p>
@@ -13745,7 +12605,154 @@
     </p:spTree>
     <p:extLst>
       <p:ext uri="{BB962C8B-B14F-4D97-AF65-F5344CB8AC3E}">
-        <p14:creationId xmlns:p14="http://schemas.microsoft.com/office/powerpoint/2010/main" val="2904217325"/>
+        <p14:creationId xmlns:p14="http://schemas.microsoft.com/office/powerpoint/2010/main" val="3033644602"/>
+      </p:ext>
+    </p:extLst>
+  </p:cSld>
+  <p:clrMapOvr>
+    <a:masterClrMapping/>
+  </p:clrMapOvr>
+</p:sld>
+</file>
+
+<file path=ppt/slides/slide18.xml><?xml version="1.0" encoding="utf-8"?>
+<p:sld xmlns:a="http://schemas.openxmlformats.org/drawingml/2006/main" xmlns:r="http://schemas.openxmlformats.org/officeDocument/2006/relationships" xmlns:p="http://schemas.openxmlformats.org/presentationml/2006/main">
+  <p:cSld>
+    <p:spTree>
+      <p:nvGrpSpPr>
+        <p:cNvPr id="1" name="Shape 343"/>
+        <p:cNvGrpSpPr/>
+        <p:nvPr/>
+      </p:nvGrpSpPr>
+      <p:grpSpPr>
+        <a:xfrm>
+          <a:off x="0" y="0"/>
+          <a:ext cx="0" cy="0"/>
+          <a:chOff x="0" y="0"/>
+          <a:chExt cx="0" cy="0"/>
+        </a:xfrm>
+      </p:grpSpPr>
+      <p:sp>
+        <p:nvSpPr>
+          <p:cNvPr id="344" name="Google Shape;344;p27"/>
+          <p:cNvSpPr txBox="1">
+            <a:spLocks noGrp="1"/>
+          </p:cNvSpPr>
+          <p:nvPr>
+            <p:ph type="ctrTitle" idx="4294967295"/>
+          </p:nvPr>
+        </p:nvSpPr>
+        <p:spPr>
+          <a:xfrm>
+            <a:off x="1152300" y="563525"/>
+            <a:ext cx="6337007" cy="882503"/>
+          </a:xfrm>
+          <a:prstGeom prst="rect">
+            <a:avLst/>
+          </a:prstGeom>
+        </p:spPr>
+        <p:txBody>
+          <a:bodyPr spcFirstLastPara="1" wrap="square" lIns="0" tIns="0" rIns="0" bIns="0" anchor="ctr" anchorCtr="0">
+            <a:noAutofit/>
+          </a:bodyPr>
+          <a:lstStyle/>
+          <a:p>
+            <a:pPr marL="0" lvl="0" indent="0" algn="ctr" rtl="0">
+              <a:spcBef>
+                <a:spcPts val="0"/>
+              </a:spcBef>
+              <a:spcAft>
+                <a:spcPts val="0"/>
+              </a:spcAft>
+              <a:buNone/>
+            </a:pPr>
+            <a:r>
+              <a:rPr lang="en" sz="6000" dirty="0"/>
+              <a:t>Thanks!</a:t>
+            </a:r>
+            <a:br>
+              <a:rPr lang="en" sz="7200" dirty="0"/>
+            </a:br>
+            <a:endParaRPr sz="3200" dirty="0"/>
+          </a:p>
+        </p:txBody>
+      </p:sp>
+      <p:sp>
+        <p:nvSpPr>
+          <p:cNvPr id="346" name="Google Shape;346;p27"/>
+          <p:cNvSpPr txBox="1">
+            <a:spLocks noGrp="1"/>
+          </p:cNvSpPr>
+          <p:nvPr>
+            <p:ph type="sldNum" idx="12"/>
+          </p:nvPr>
+        </p:nvSpPr>
+        <p:spPr>
+          <a:xfrm>
+            <a:off x="0" y="4762400"/>
+            <a:ext cx="381000" cy="386400"/>
+          </a:xfrm>
+          <a:prstGeom prst="rect">
+            <a:avLst/>
+          </a:prstGeom>
+        </p:spPr>
+        <p:txBody>
+          <a:bodyPr spcFirstLastPara="1" wrap="square" lIns="0" tIns="0" rIns="0" bIns="0" anchor="ctr" anchorCtr="0">
+            <a:noAutofit/>
+          </a:bodyPr>
+          <a:lstStyle/>
+          <a:p>
+            <a:pPr marL="0" lvl="0" indent="0" algn="ctr" rtl="0">
+              <a:spcBef>
+                <a:spcPts val="0"/>
+              </a:spcBef>
+              <a:spcAft>
+                <a:spcPts val="0"/>
+              </a:spcAft>
+              <a:buNone/>
+            </a:pPr>
+            <a:fld id="{00000000-1234-1234-1234-123412341234}" type="slidenum">
+              <a:rPr lang="en"/>
+              <a:t>18</a:t>
+            </a:fld>
+            <a:endParaRPr/>
+          </a:p>
+        </p:txBody>
+      </p:sp>
+      <p:pic>
+        <p:nvPicPr>
+          <p:cNvPr id="2" name="Picture 1">
+            <a:extLst>
+              <a:ext uri="{FF2B5EF4-FFF2-40B4-BE49-F238E27FC236}">
+                <a16:creationId xmlns:a16="http://schemas.microsoft.com/office/drawing/2014/main" id="{C1C4ECD3-6AB0-674F-918E-3283F4AD6857}"/>
+              </a:ext>
+            </a:extLst>
+          </p:cNvPr>
+          <p:cNvPicPr>
+            <a:picLocks noChangeAspect="1"/>
+          </p:cNvPicPr>
+          <p:nvPr/>
+        </p:nvPicPr>
+        <p:blipFill>
+          <a:blip r:embed="rId3"/>
+          <a:stretch>
+            <a:fillRect/>
+          </a:stretch>
+        </p:blipFill>
+        <p:spPr>
+          <a:xfrm>
+            <a:off x="1674036" y="1148317"/>
+            <a:ext cx="5293534" cy="3529023"/>
+          </a:xfrm>
+          <a:prstGeom prst="rect">
+            <a:avLst/>
+          </a:prstGeom>
+        </p:spPr>
+      </p:pic>
+    </p:spTree>
+    <p:extLst>
+      <p:ext uri="{BB962C8B-B14F-4D97-AF65-F5344CB8AC3E}">
+        <p14:creationId xmlns:p14="http://schemas.microsoft.com/office/powerpoint/2010/main" val="2272813329"/>
       </p:ext>
     </p:extLst>
   </p:cSld>
@@ -13756,6 +12763,659 @@
 </file>
 
 <file path=ppt/slides/slide19.xml><?xml version="1.0" encoding="utf-8"?>
+<p:sld xmlns:a="http://schemas.openxmlformats.org/drawingml/2006/main" xmlns:r="http://schemas.openxmlformats.org/officeDocument/2006/relationships" xmlns:p="http://schemas.openxmlformats.org/presentationml/2006/main">
+  <p:cSld>
+    <p:spTree>
+      <p:nvGrpSpPr>
+        <p:cNvPr id="1" name="Shape 183"/>
+        <p:cNvGrpSpPr/>
+        <p:nvPr/>
+      </p:nvGrpSpPr>
+      <p:grpSpPr>
+        <a:xfrm>
+          <a:off x="0" y="0"/>
+          <a:ext cx="0" cy="0"/>
+          <a:chOff x="0" y="0"/>
+          <a:chExt cx="0" cy="0"/>
+        </a:xfrm>
+      </p:grpSpPr>
+      <p:sp>
+        <p:nvSpPr>
+          <p:cNvPr id="184" name="Google Shape;184;p16"/>
+          <p:cNvSpPr txBox="1">
+            <a:spLocks noGrp="1"/>
+          </p:cNvSpPr>
+          <p:nvPr>
+            <p:ph type="ctrTitle"/>
+          </p:nvPr>
+        </p:nvSpPr>
+        <p:spPr>
+          <a:xfrm>
+            <a:off x="397919" y="1437671"/>
+            <a:ext cx="5209382" cy="1561179"/>
+          </a:xfrm>
+          <a:prstGeom prst="rect">
+            <a:avLst/>
+          </a:prstGeom>
+        </p:spPr>
+        <p:txBody>
+          <a:bodyPr spcFirstLastPara="1" wrap="square" lIns="0" tIns="0" rIns="0" bIns="0" anchor="b" anchorCtr="0">
+            <a:noAutofit/>
+          </a:bodyPr>
+          <a:lstStyle/>
+          <a:p>
+            <a:pPr algn="ctr">
+              <a:lnSpc>
+                <a:spcPct val="140016"/>
+              </a:lnSpc>
+            </a:pPr>
+            <a:r>
+              <a:rPr lang="en-US" sz="5400" dirty="0"/>
+              <a:t>Appendix</a:t>
+            </a:r>
+          </a:p>
+        </p:txBody>
+      </p:sp>
+      <p:sp>
+        <p:nvSpPr>
+          <p:cNvPr id="186" name="Google Shape;186;p16"/>
+          <p:cNvSpPr txBox="1"/>
+          <p:nvPr/>
+        </p:nvSpPr>
+        <p:spPr>
+          <a:xfrm>
+            <a:off x="6589900" y="759950"/>
+            <a:ext cx="2554200" cy="2561700"/>
+          </a:xfrm>
+          <a:prstGeom prst="rect">
+            <a:avLst/>
+          </a:prstGeom>
+          <a:noFill/>
+          <a:ln>
+            <a:noFill/>
+          </a:ln>
+        </p:spPr>
+        <p:txBody>
+          <a:bodyPr spcFirstLastPara="1" wrap="square" lIns="91425" tIns="91425" rIns="91425" bIns="91425" anchor="ctr" anchorCtr="0">
+            <a:noAutofit/>
+          </a:bodyPr>
+          <a:lstStyle/>
+          <a:p>
+            <a:pPr marL="0" lvl="0" indent="0" algn="ctr" rtl="0">
+              <a:spcBef>
+                <a:spcPts val="0"/>
+              </a:spcBef>
+              <a:spcAft>
+                <a:spcPts val="0"/>
+              </a:spcAft>
+              <a:buNone/>
+            </a:pPr>
+            <a:endParaRPr sz="9600" dirty="0">
+              <a:solidFill>
+                <a:schemeClr val="lt1"/>
+              </a:solidFill>
+              <a:latin typeface="Barlow SemiBold"/>
+              <a:ea typeface="Barlow SemiBold"/>
+              <a:cs typeface="Barlow SemiBold"/>
+              <a:sym typeface="Barlow SemiBold"/>
+            </a:endParaRPr>
+          </a:p>
+        </p:txBody>
+      </p:sp>
+    </p:spTree>
+    <p:extLst>
+      <p:ext uri="{BB962C8B-B14F-4D97-AF65-F5344CB8AC3E}">
+        <p14:creationId xmlns:p14="http://schemas.microsoft.com/office/powerpoint/2010/main" val="1749491187"/>
+      </p:ext>
+    </p:extLst>
+  </p:cSld>
+  <p:clrMapOvr>
+    <a:masterClrMapping/>
+  </p:clrMapOvr>
+</p:sld>
+</file>
+
+<file path=ppt/slides/slide2.xml><?xml version="1.0" encoding="utf-8"?>
+<p:sld xmlns:a="http://schemas.openxmlformats.org/drawingml/2006/main" xmlns:r="http://schemas.openxmlformats.org/officeDocument/2006/relationships" xmlns:p="http://schemas.openxmlformats.org/presentationml/2006/main">
+  <p:cSld>
+    <p:spTree>
+      <p:nvGrpSpPr>
+        <p:cNvPr id="1" name="Shape 153"/>
+        <p:cNvGrpSpPr/>
+        <p:nvPr/>
+      </p:nvGrpSpPr>
+      <p:grpSpPr>
+        <a:xfrm>
+          <a:off x="0" y="0"/>
+          <a:ext cx="0" cy="0"/>
+          <a:chOff x="0" y="0"/>
+          <a:chExt cx="0" cy="0"/>
+        </a:xfrm>
+      </p:grpSpPr>
+      <p:grpSp>
+        <p:nvGrpSpPr>
+          <p:cNvPr id="154" name="Google Shape;154;p13"/>
+          <p:cNvGrpSpPr/>
+          <p:nvPr/>
+        </p:nvGrpSpPr>
+        <p:grpSpPr>
+          <a:xfrm>
+            <a:off x="8013742" y="4015142"/>
+            <a:ext cx="600715" cy="600715"/>
+            <a:chOff x="8762414" y="2939573"/>
+            <a:chExt cx="457200" cy="457200"/>
+          </a:xfrm>
+        </p:grpSpPr>
+        <p:sp>
+          <p:nvSpPr>
+            <p:cNvPr id="155" name="Google Shape;155;p13"/>
+            <p:cNvSpPr/>
+            <p:nvPr/>
+          </p:nvSpPr>
+          <p:spPr>
+            <a:xfrm>
+              <a:off x="9010064" y="3034823"/>
+              <a:ext cx="209550" cy="66675"/>
+            </a:xfrm>
+            <a:custGeom>
+              <a:avLst/>
+              <a:gdLst/>
+              <a:ahLst/>
+              <a:cxnLst/>
+              <a:rect l="l" t="t" r="r" b="b"/>
+              <a:pathLst>
+                <a:path w="209550" h="66675" extrusionOk="0">
+                  <a:moveTo>
+                    <a:pt x="200025" y="0"/>
+                  </a:moveTo>
+                  <a:lnTo>
+                    <a:pt x="9525" y="0"/>
+                  </a:lnTo>
+                  <a:cubicBezTo>
+                    <a:pt x="3810" y="0"/>
+                    <a:pt x="0" y="3810"/>
+                    <a:pt x="0" y="9525"/>
+                  </a:cubicBezTo>
+                  <a:lnTo>
+                    <a:pt x="0" y="57150"/>
+                  </a:lnTo>
+                  <a:cubicBezTo>
+                    <a:pt x="0" y="62865"/>
+                    <a:pt x="3810" y="66675"/>
+                    <a:pt x="9525" y="66675"/>
+                  </a:cubicBezTo>
+                  <a:lnTo>
+                    <a:pt x="200025" y="66675"/>
+                  </a:lnTo>
+                  <a:cubicBezTo>
+                    <a:pt x="205740" y="66675"/>
+                    <a:pt x="209550" y="62865"/>
+                    <a:pt x="209550" y="57150"/>
+                  </a:cubicBezTo>
+                  <a:lnTo>
+                    <a:pt x="209550" y="9525"/>
+                  </a:lnTo>
+                  <a:cubicBezTo>
+                    <a:pt x="209550" y="3810"/>
+                    <a:pt x="205740" y="0"/>
+                    <a:pt x="200025" y="0"/>
+                  </a:cubicBezTo>
+                  <a:close/>
+                </a:path>
+              </a:pathLst>
+            </a:custGeom>
+            <a:solidFill>
+              <a:schemeClr val="lt1"/>
+            </a:solidFill>
+            <a:ln>
+              <a:noFill/>
+            </a:ln>
+            <a:effectLst>
+              <a:outerShdw dist="19050" dir="5400000" algn="bl" rotWithShape="0">
+                <a:schemeClr val="dk1">
+                  <a:alpha val="20000"/>
+                </a:schemeClr>
+              </a:outerShdw>
+            </a:effectLst>
+          </p:spPr>
+          <p:txBody>
+            <a:bodyPr spcFirstLastPara="1" wrap="square" lIns="91425" tIns="45700" rIns="91425" bIns="45700" anchor="ctr" anchorCtr="0">
+              <a:noAutofit/>
+            </a:bodyPr>
+            <a:lstStyle/>
+            <a:p>
+              <a:pPr marL="0" marR="0" lvl="0" indent="0" algn="l" rtl="0">
+                <a:spcBef>
+                  <a:spcPts val="0"/>
+                </a:spcBef>
+                <a:spcAft>
+                  <a:spcPts val="0"/>
+                </a:spcAft>
+                <a:buNone/>
+              </a:pPr>
+              <a:endParaRPr sz="1800">
+                <a:solidFill>
+                  <a:srgbClr val="000000"/>
+                </a:solidFill>
+                <a:latin typeface="Calibri"/>
+                <a:ea typeface="Calibri"/>
+                <a:cs typeface="Calibri"/>
+                <a:sym typeface="Calibri"/>
+              </a:endParaRPr>
+            </a:p>
+          </p:txBody>
+        </p:sp>
+        <p:sp>
+          <p:nvSpPr>
+            <p:cNvPr id="156" name="Google Shape;156;p13"/>
+            <p:cNvSpPr/>
+            <p:nvPr/>
+          </p:nvSpPr>
+          <p:spPr>
+            <a:xfrm>
+              <a:off x="9029114" y="3120548"/>
+              <a:ext cx="171450" cy="276225"/>
+            </a:xfrm>
+            <a:custGeom>
+              <a:avLst/>
+              <a:gdLst/>
+              <a:ahLst/>
+              <a:cxnLst/>
+              <a:rect l="l" t="t" r="r" b="b"/>
+              <a:pathLst>
+                <a:path w="171450" h="276225" extrusionOk="0">
+                  <a:moveTo>
+                    <a:pt x="0" y="266700"/>
+                  </a:moveTo>
+                  <a:cubicBezTo>
+                    <a:pt x="0" y="272415"/>
+                    <a:pt x="3810" y="276225"/>
+                    <a:pt x="9525" y="276225"/>
+                  </a:cubicBezTo>
+                  <a:lnTo>
+                    <a:pt x="161925" y="276225"/>
+                  </a:lnTo>
+                  <a:cubicBezTo>
+                    <a:pt x="167640" y="276225"/>
+                    <a:pt x="171450" y="272415"/>
+                    <a:pt x="171450" y="266700"/>
+                  </a:cubicBezTo>
+                  <a:lnTo>
+                    <a:pt x="171450" y="0"/>
+                  </a:lnTo>
+                  <a:lnTo>
+                    <a:pt x="0" y="0"/>
+                  </a:lnTo>
+                  <a:lnTo>
+                    <a:pt x="0" y="266700"/>
+                  </a:lnTo>
+                  <a:close/>
+                  <a:moveTo>
+                    <a:pt x="28575" y="57150"/>
+                  </a:moveTo>
+                  <a:cubicBezTo>
+                    <a:pt x="28575" y="51435"/>
+                    <a:pt x="32385" y="47625"/>
+                    <a:pt x="38100" y="47625"/>
+                  </a:cubicBezTo>
+                  <a:lnTo>
+                    <a:pt x="133350" y="47625"/>
+                  </a:lnTo>
+                  <a:cubicBezTo>
+                    <a:pt x="139065" y="47625"/>
+                    <a:pt x="142875" y="51435"/>
+                    <a:pt x="142875" y="57150"/>
+                  </a:cubicBezTo>
+                  <a:lnTo>
+                    <a:pt x="142875" y="123825"/>
+                  </a:lnTo>
+                  <a:cubicBezTo>
+                    <a:pt x="142875" y="129540"/>
+                    <a:pt x="139065" y="133350"/>
+                    <a:pt x="133350" y="133350"/>
+                  </a:cubicBezTo>
+                  <a:lnTo>
+                    <a:pt x="38100" y="133350"/>
+                  </a:lnTo>
+                  <a:cubicBezTo>
+                    <a:pt x="32385" y="133350"/>
+                    <a:pt x="28575" y="129540"/>
+                    <a:pt x="28575" y="123825"/>
+                  </a:cubicBezTo>
+                  <a:lnTo>
+                    <a:pt x="28575" y="57150"/>
+                  </a:lnTo>
+                  <a:close/>
+                  <a:moveTo>
+                    <a:pt x="38100" y="161925"/>
+                  </a:moveTo>
+                  <a:lnTo>
+                    <a:pt x="133350" y="161925"/>
+                  </a:lnTo>
+                  <a:cubicBezTo>
+                    <a:pt x="139065" y="161925"/>
+                    <a:pt x="142875" y="165735"/>
+                    <a:pt x="142875" y="171450"/>
+                  </a:cubicBezTo>
+                  <a:cubicBezTo>
+                    <a:pt x="142875" y="177165"/>
+                    <a:pt x="139065" y="180975"/>
+                    <a:pt x="133350" y="180975"/>
+                  </a:cubicBezTo>
+                  <a:lnTo>
+                    <a:pt x="38100" y="180975"/>
+                  </a:lnTo>
+                  <a:cubicBezTo>
+                    <a:pt x="32385" y="180975"/>
+                    <a:pt x="28575" y="177165"/>
+                    <a:pt x="28575" y="171450"/>
+                  </a:cubicBezTo>
+                  <a:cubicBezTo>
+                    <a:pt x="28575" y="165735"/>
+                    <a:pt x="32385" y="161925"/>
+                    <a:pt x="38100" y="161925"/>
+                  </a:cubicBezTo>
+                  <a:close/>
+                </a:path>
+              </a:pathLst>
+            </a:custGeom>
+            <a:solidFill>
+              <a:schemeClr val="lt1"/>
+            </a:solidFill>
+            <a:ln>
+              <a:noFill/>
+            </a:ln>
+            <a:effectLst>
+              <a:outerShdw dist="19050" dir="5400000" algn="bl" rotWithShape="0">
+                <a:schemeClr val="dk1">
+                  <a:alpha val="20000"/>
+                </a:schemeClr>
+              </a:outerShdw>
+            </a:effectLst>
+          </p:spPr>
+          <p:txBody>
+            <a:bodyPr spcFirstLastPara="1" wrap="square" lIns="91425" tIns="45700" rIns="91425" bIns="45700" anchor="ctr" anchorCtr="0">
+              <a:noAutofit/>
+            </a:bodyPr>
+            <a:lstStyle/>
+            <a:p>
+              <a:pPr marL="0" marR="0" lvl="0" indent="0" algn="l" rtl="0">
+                <a:spcBef>
+                  <a:spcPts val="0"/>
+                </a:spcBef>
+                <a:spcAft>
+                  <a:spcPts val="0"/>
+                </a:spcAft>
+                <a:buNone/>
+              </a:pPr>
+              <a:endParaRPr sz="1800">
+                <a:solidFill>
+                  <a:srgbClr val="000000"/>
+                </a:solidFill>
+                <a:latin typeface="Calibri"/>
+                <a:ea typeface="Calibri"/>
+                <a:cs typeface="Calibri"/>
+                <a:sym typeface="Calibri"/>
+              </a:endParaRPr>
+            </a:p>
+          </p:txBody>
+        </p:sp>
+        <p:sp>
+          <p:nvSpPr>
+            <p:cNvPr id="157" name="Google Shape;157;p13"/>
+            <p:cNvSpPr/>
+            <p:nvPr/>
+          </p:nvSpPr>
+          <p:spPr>
+            <a:xfrm>
+              <a:off x="8762414" y="2939573"/>
+              <a:ext cx="200025" cy="457200"/>
+            </a:xfrm>
+            <a:custGeom>
+              <a:avLst/>
+              <a:gdLst/>
+              <a:ahLst/>
+              <a:cxnLst/>
+              <a:rect l="l" t="t" r="r" b="b"/>
+              <a:pathLst>
+                <a:path w="200025" h="457200" extrusionOk="0">
+                  <a:moveTo>
+                    <a:pt x="185738" y="76200"/>
+                  </a:moveTo>
+                  <a:lnTo>
+                    <a:pt x="133350" y="76200"/>
+                  </a:lnTo>
+                  <a:lnTo>
+                    <a:pt x="133350" y="28575"/>
+                  </a:lnTo>
+                  <a:lnTo>
+                    <a:pt x="157163" y="28575"/>
+                  </a:lnTo>
+                  <a:cubicBezTo>
+                    <a:pt x="164783" y="28575"/>
+                    <a:pt x="171450" y="21908"/>
+                    <a:pt x="171450" y="14288"/>
+                  </a:cubicBezTo>
+                  <a:cubicBezTo>
+                    <a:pt x="171450" y="6668"/>
+                    <a:pt x="164783" y="0"/>
+                    <a:pt x="157163" y="0"/>
+                  </a:cubicBezTo>
+                  <a:lnTo>
+                    <a:pt x="42863" y="0"/>
+                  </a:lnTo>
+                  <a:cubicBezTo>
+                    <a:pt x="35243" y="0"/>
+                    <a:pt x="28575" y="6668"/>
+                    <a:pt x="28575" y="14288"/>
+                  </a:cubicBezTo>
+                  <a:cubicBezTo>
+                    <a:pt x="28575" y="21908"/>
+                    <a:pt x="35243" y="28575"/>
+                    <a:pt x="42863" y="28575"/>
+                  </a:cubicBezTo>
+                  <a:lnTo>
+                    <a:pt x="66675" y="28575"/>
+                  </a:lnTo>
+                  <a:lnTo>
+                    <a:pt x="66675" y="76200"/>
+                  </a:lnTo>
+                  <a:lnTo>
+                    <a:pt x="14288" y="76200"/>
+                  </a:lnTo>
+                  <a:cubicBezTo>
+                    <a:pt x="6668" y="76200"/>
+                    <a:pt x="0" y="82868"/>
+                    <a:pt x="0" y="90488"/>
+                  </a:cubicBezTo>
+                  <a:cubicBezTo>
+                    <a:pt x="0" y="98108"/>
+                    <a:pt x="6668" y="104775"/>
+                    <a:pt x="14288" y="104775"/>
+                  </a:cubicBezTo>
+                  <a:lnTo>
+                    <a:pt x="47625" y="104775"/>
+                  </a:lnTo>
+                  <a:lnTo>
+                    <a:pt x="47625" y="323850"/>
+                  </a:lnTo>
+                  <a:cubicBezTo>
+                    <a:pt x="47625" y="334328"/>
+                    <a:pt x="56198" y="342900"/>
+                    <a:pt x="66675" y="342900"/>
+                  </a:cubicBezTo>
+                  <a:lnTo>
+                    <a:pt x="66675" y="361950"/>
+                  </a:lnTo>
+                  <a:cubicBezTo>
+                    <a:pt x="66675" y="367665"/>
+                    <a:pt x="70485" y="371475"/>
+                    <a:pt x="76200" y="371475"/>
+                  </a:cubicBezTo>
+                  <a:lnTo>
+                    <a:pt x="85725" y="371475"/>
+                  </a:lnTo>
+                  <a:lnTo>
+                    <a:pt x="85725" y="442913"/>
+                  </a:lnTo>
+                  <a:cubicBezTo>
+                    <a:pt x="85725" y="450533"/>
+                    <a:pt x="92393" y="457200"/>
+                    <a:pt x="100013" y="457200"/>
+                  </a:cubicBezTo>
+                  <a:cubicBezTo>
+                    <a:pt x="107633" y="457200"/>
+                    <a:pt x="114300" y="450533"/>
+                    <a:pt x="114300" y="442913"/>
+                  </a:cubicBezTo>
+                  <a:lnTo>
+                    <a:pt x="114300" y="371475"/>
+                  </a:lnTo>
+                  <a:lnTo>
+                    <a:pt x="123825" y="371475"/>
+                  </a:lnTo>
+                  <a:cubicBezTo>
+                    <a:pt x="129540" y="371475"/>
+                    <a:pt x="133350" y="367665"/>
+                    <a:pt x="133350" y="361950"/>
+                  </a:cubicBezTo>
+                  <a:lnTo>
+                    <a:pt x="133350" y="342900"/>
+                  </a:lnTo>
+                  <a:cubicBezTo>
+                    <a:pt x="143828" y="342900"/>
+                    <a:pt x="152400" y="334328"/>
+                    <a:pt x="152400" y="323850"/>
+                  </a:cubicBezTo>
+                  <a:lnTo>
+                    <a:pt x="152400" y="104775"/>
+                  </a:lnTo>
+                  <a:lnTo>
+                    <a:pt x="185738" y="104775"/>
+                  </a:lnTo>
+                  <a:cubicBezTo>
+                    <a:pt x="193358" y="104775"/>
+                    <a:pt x="200025" y="98108"/>
+                    <a:pt x="200025" y="90488"/>
+                  </a:cubicBezTo>
+                  <a:cubicBezTo>
+                    <a:pt x="200025" y="82868"/>
+                    <a:pt x="193358" y="76200"/>
+                    <a:pt x="185738" y="76200"/>
+                  </a:cubicBezTo>
+                  <a:close/>
+                  <a:moveTo>
+                    <a:pt x="123825" y="247650"/>
+                  </a:moveTo>
+                  <a:lnTo>
+                    <a:pt x="76200" y="247650"/>
+                  </a:lnTo>
+                  <a:lnTo>
+                    <a:pt x="76200" y="123825"/>
+                  </a:lnTo>
+                  <a:lnTo>
+                    <a:pt x="123825" y="123825"/>
+                  </a:lnTo>
+                  <a:lnTo>
+                    <a:pt x="123825" y="247650"/>
+                  </a:lnTo>
+                  <a:close/>
+                </a:path>
+              </a:pathLst>
+            </a:custGeom>
+            <a:solidFill>
+              <a:schemeClr val="lt1"/>
+            </a:solidFill>
+            <a:ln>
+              <a:noFill/>
+            </a:ln>
+            <a:effectLst>
+              <a:outerShdw dist="19050" dir="5400000" algn="bl" rotWithShape="0">
+                <a:schemeClr val="dk1">
+                  <a:alpha val="20000"/>
+                </a:schemeClr>
+              </a:outerShdw>
+            </a:effectLst>
+          </p:spPr>
+          <p:txBody>
+            <a:bodyPr spcFirstLastPara="1" wrap="square" lIns="91425" tIns="45700" rIns="91425" bIns="45700" anchor="ctr" anchorCtr="0">
+              <a:noAutofit/>
+            </a:bodyPr>
+            <a:lstStyle/>
+            <a:p>
+              <a:pPr marL="0" marR="0" lvl="0" indent="0" algn="l" rtl="0">
+                <a:spcBef>
+                  <a:spcPts val="0"/>
+                </a:spcBef>
+                <a:spcAft>
+                  <a:spcPts val="0"/>
+                </a:spcAft>
+                <a:buNone/>
+              </a:pPr>
+              <a:endParaRPr sz="1800">
+                <a:solidFill>
+                  <a:srgbClr val="000000"/>
+                </a:solidFill>
+                <a:latin typeface="Calibri"/>
+                <a:ea typeface="Calibri"/>
+                <a:cs typeface="Calibri"/>
+                <a:sym typeface="Calibri"/>
+              </a:endParaRPr>
+            </a:p>
+          </p:txBody>
+        </p:sp>
+      </p:grpSp>
+      <p:sp>
+        <p:nvSpPr>
+          <p:cNvPr id="158" name="Google Shape;158;p13"/>
+          <p:cNvSpPr txBox="1">
+            <a:spLocks noGrp="1"/>
+          </p:cNvSpPr>
+          <p:nvPr>
+            <p:ph type="ctrTitle"/>
+          </p:nvPr>
+        </p:nvSpPr>
+        <p:spPr>
+          <a:xfrm>
+            <a:off x="614975" y="3124850"/>
+            <a:ext cx="6058800" cy="1532100"/>
+          </a:xfrm>
+          <a:prstGeom prst="rect">
+            <a:avLst/>
+          </a:prstGeom>
+        </p:spPr>
+        <p:txBody>
+          <a:bodyPr spcFirstLastPara="1" wrap="square" lIns="0" tIns="0" rIns="0" bIns="0" anchor="ctr" anchorCtr="0">
+            <a:noAutofit/>
+          </a:bodyPr>
+          <a:lstStyle/>
+          <a:p>
+            <a:pPr marL="0" lvl="0" indent="0" algn="l" rtl="0">
+              <a:spcBef>
+                <a:spcPts val="0"/>
+              </a:spcBef>
+              <a:spcAft>
+                <a:spcPts val="0"/>
+              </a:spcAft>
+              <a:buNone/>
+            </a:pPr>
+            <a:r>
+              <a:rPr lang="en" dirty="0"/>
+              <a:t>Hospital Costs vs. Quality of Care</a:t>
+            </a:r>
+            <a:endParaRPr dirty="0"/>
+          </a:p>
+        </p:txBody>
+      </p:sp>
+    </p:spTree>
+  </p:cSld>
+  <p:clrMapOvr>
+    <a:masterClrMapping/>
+  </p:clrMapOvr>
+</p:sld>
+</file>
+
+<file path=ppt/slides/slide20.xml><?xml version="1.0" encoding="utf-8"?>
 <p:sld xmlns:a="http://schemas.openxmlformats.org/drawingml/2006/main" xmlns:r="http://schemas.openxmlformats.org/officeDocument/2006/relationships" xmlns:p="http://schemas.openxmlformats.org/presentationml/2006/main">
   <p:cSld>
     <p:spTree>
@@ -13808,7 +13468,7 @@
             </a:pPr>
             <a:r>
               <a:rPr lang="en" dirty="0"/>
-              <a:t>Next Steps</a:t>
+              <a:t>Data Limitations</a:t>
             </a:r>
             <a:endParaRPr dirty="0"/>
           </a:p>
@@ -13826,8 +13486,8 @@
         </p:nvSpPr>
         <p:spPr>
           <a:xfrm>
-            <a:off x="614975" y="1479739"/>
-            <a:ext cx="6757800" cy="3669061"/>
+            <a:off x="614974" y="1310850"/>
+            <a:ext cx="7072365" cy="3669061"/>
           </a:xfrm>
           <a:prstGeom prst="rect">
             <a:avLst/>
@@ -13842,7 +13502,7 @@
             <a:pPr lvl="0"/>
             <a:r>
               <a:rPr lang="en" sz="1800" dirty="0"/>
-              <a:t>Locate data for additional conditions, and for other types of facilities (outpatient, urgent care, etc.)</a:t>
+              <a:t>The costs for only these 4 medical conditions were present, it would have been ideal to have more conditions to observe correlations for, preferably those with longer episodes of care.</a:t>
             </a:r>
           </a:p>
           <a:p>
@@ -13855,7 +13515,15 @@
             <a:pPr lvl="0"/>
             <a:r>
               <a:rPr lang="en" sz="1800" dirty="0"/>
-              <a:t>Utilize data for other types of outcome measurements (aside from just complication / mortality rates).</a:t>
+              <a:t>Many hospitals are either too small to report on cost/quality data, or just do not participate in the Medicare scoring program entirely.  These null records were om</a:t>
+            </a:r>
+            <a:r>
+              <a:rPr lang="en-US" sz="1800" dirty="0"/>
+              <a:t>it</a:t>
+            </a:r>
+            <a:r>
+              <a:rPr lang="en" sz="1800" dirty="0"/>
+              <a:t>ted from the map.</a:t>
             </a:r>
           </a:p>
           <a:p>
@@ -13867,16 +13535,12 @@
           <a:p>
             <a:r>
               <a:rPr lang="en" sz="1800" dirty="0"/>
-              <a:t>Some health tech companies specialize in this type of work, steering employees to higher-quality providers and providing more </a:t>
+              <a:t>In order to plot points on the map, the hospital addresses required geocoding within Python to obtain coordinate values.  Some hospitals could not be located with the geocoding method (roughly 1,000 out of 18,000 records)</a:t>
             </a:r>
-            <a:r>
-              <a:rPr lang="en-US" sz="1800" dirty="0"/>
-              <a:t>transparency </a:t>
-            </a:r>
-            <a:r>
-              <a:rPr lang="en" sz="1800" dirty="0"/>
-              <a:t>for the costs of various procedures.</a:t>
-            </a:r>
+          </a:p>
+          <a:p>
+            <a:pPr lvl="0"/>
+            <a:endParaRPr lang="en" dirty="0"/>
           </a:p>
           <a:p>
             <a:pPr marL="76200" lvl="0" indent="0">
@@ -13922,7 +13586,7 @@
             </a:pPr>
             <a:fld id="{00000000-1234-1234-1234-123412341234}" type="slidenum">
               <a:rPr lang="en"/>
-              <a:t>19</a:t>
+              <a:t>20</a:t>
             </a:fld>
             <a:endParaRPr/>
           </a:p>
@@ -14262,7 +13926,7 @@
     </p:spTree>
     <p:extLst>
       <p:ext uri="{BB962C8B-B14F-4D97-AF65-F5344CB8AC3E}">
-        <p14:creationId xmlns:p14="http://schemas.microsoft.com/office/powerpoint/2010/main" val="3033644602"/>
+        <p14:creationId xmlns:p14="http://schemas.microsoft.com/office/powerpoint/2010/main" val="2904217325"/>
       </p:ext>
     </p:extLst>
   </p:cSld>
@@ -14272,256 +13936,7 @@
 </p:sld>
 </file>
 
-<file path=ppt/slides/slide2.xml><?xml version="1.0" encoding="utf-8"?>
-<p:sld xmlns:a="http://schemas.openxmlformats.org/drawingml/2006/main" xmlns:r="http://schemas.openxmlformats.org/officeDocument/2006/relationships" xmlns:p="http://schemas.openxmlformats.org/presentationml/2006/main">
-  <p:cSld>
-    <p:bg>
-      <p:bgPr>
-        <a:solidFill>
-          <a:schemeClr val="lt1"/>
-        </a:solidFill>
-        <a:effectLst/>
-      </p:bgPr>
-    </p:bg>
-    <p:spTree>
-      <p:nvGrpSpPr>
-        <p:cNvPr id="1" name="Shape 175"/>
-        <p:cNvGrpSpPr/>
-        <p:nvPr/>
-      </p:nvGrpSpPr>
-      <p:grpSpPr>
-        <a:xfrm>
-          <a:off x="0" y="0"/>
-          <a:ext cx="0" cy="0"/>
-          <a:chOff x="0" y="0"/>
-          <a:chExt cx="0" cy="0"/>
-        </a:xfrm>
-      </p:grpSpPr>
-      <p:sp>
-        <p:nvSpPr>
-          <p:cNvPr id="176" name="Google Shape;176;p15"/>
-          <p:cNvSpPr txBox="1">
-            <a:spLocks noGrp="1"/>
-          </p:cNvSpPr>
-          <p:nvPr>
-            <p:ph type="title"/>
-          </p:nvPr>
-        </p:nvSpPr>
-        <p:spPr>
-          <a:xfrm>
-            <a:off x="614975" y="899100"/>
-            <a:ext cx="3613200" cy="1228500"/>
-          </a:xfrm>
-          <a:prstGeom prst="rect">
-            <a:avLst/>
-          </a:prstGeom>
-        </p:spPr>
-        <p:txBody>
-          <a:bodyPr spcFirstLastPara="1" wrap="square" lIns="0" tIns="0" rIns="0" bIns="0" anchor="t" anchorCtr="0">
-            <a:noAutofit/>
-          </a:bodyPr>
-          <a:lstStyle/>
-          <a:p>
-            <a:pPr marL="0" lvl="0" indent="0" algn="l" rtl="0">
-              <a:spcBef>
-                <a:spcPts val="0"/>
-              </a:spcBef>
-              <a:spcAft>
-                <a:spcPts val="0"/>
-              </a:spcAft>
-              <a:buNone/>
-            </a:pPr>
-            <a:r>
-              <a:rPr lang="en" sz="9600"/>
-              <a:t>Hello!</a:t>
-            </a:r>
-            <a:endParaRPr sz="9600"/>
-          </a:p>
-        </p:txBody>
-      </p:sp>
-      <p:sp>
-        <p:nvSpPr>
-          <p:cNvPr id="177" name="Google Shape;177;p15"/>
-          <p:cNvSpPr txBox="1">
-            <a:spLocks noGrp="1"/>
-          </p:cNvSpPr>
-          <p:nvPr>
-            <p:ph type="body" idx="1"/>
-          </p:nvPr>
-        </p:nvSpPr>
-        <p:spPr>
-          <a:xfrm>
-            <a:off x="273143" y="2199741"/>
-            <a:ext cx="4076665" cy="2329530"/>
-          </a:xfrm>
-          <a:prstGeom prst="rect">
-            <a:avLst/>
-          </a:prstGeom>
-        </p:spPr>
-        <p:txBody>
-          <a:bodyPr spcFirstLastPara="1" wrap="square" lIns="0" tIns="0" rIns="0" bIns="0" anchor="t" anchorCtr="0">
-            <a:noAutofit/>
-          </a:bodyPr>
-          <a:lstStyle/>
-          <a:p>
-            <a:pPr marL="0" lvl="0" indent="0" algn="l" rtl="0">
-              <a:spcBef>
-                <a:spcPts val="600"/>
-              </a:spcBef>
-              <a:spcAft>
-                <a:spcPts val="0"/>
-              </a:spcAft>
-              <a:buNone/>
-            </a:pPr>
-            <a:r>
-              <a:rPr lang="en" b="1" dirty="0">
-                <a:solidFill>
-                  <a:schemeClr val="accent3"/>
-                </a:solidFill>
-                <a:latin typeface="Barlow"/>
-                <a:ea typeface="Barlow"/>
-                <a:cs typeface="Barlow"/>
-                <a:sym typeface="Barlow"/>
-              </a:rPr>
-              <a:t>I’m </a:t>
-            </a:r>
-            <a:r>
-              <a:rPr lang="en-US" b="1" dirty="0">
-                <a:solidFill>
-                  <a:schemeClr val="accent3"/>
-                </a:solidFill>
-                <a:latin typeface="Barlow"/>
-                <a:ea typeface="Barlow"/>
-                <a:cs typeface="Barlow"/>
-                <a:sym typeface="Barlow"/>
-              </a:rPr>
-              <a:t>Charlie Napier</a:t>
-            </a:r>
-            <a:endParaRPr b="1" dirty="0">
-              <a:solidFill>
-                <a:schemeClr val="accent3"/>
-              </a:solidFill>
-              <a:latin typeface="Barlow"/>
-              <a:ea typeface="Barlow"/>
-              <a:cs typeface="Barlow"/>
-              <a:sym typeface="Barlow"/>
-            </a:endParaRPr>
-          </a:p>
-          <a:p>
-            <a:pPr marL="342900" indent="-342900">
-              <a:buClr>
-                <a:schemeClr val="dk1"/>
-              </a:buClr>
-              <a:buSzPts val="1100"/>
-            </a:pPr>
-            <a:r>
-              <a:rPr lang="en-US" sz="1800" dirty="0"/>
-              <a:t>I am a financial consulting professional in the health insurance brokerage sector.</a:t>
-            </a:r>
-            <a:endParaRPr sz="1800" dirty="0"/>
-          </a:p>
-          <a:p>
-            <a:pPr marL="342900" indent="-342900">
-              <a:buClr>
-                <a:schemeClr val="dk1"/>
-              </a:buClr>
-              <a:buSzPts val="1100"/>
-            </a:pPr>
-            <a:r>
-              <a:rPr lang="en" sz="1800" dirty="0"/>
-              <a:t>You can find me here on </a:t>
-            </a:r>
-            <a:r>
-              <a:rPr lang="en-US" sz="1800" dirty="0">
-                <a:hlinkClick r:id="rId3"/>
-              </a:rPr>
-              <a:t>LinkedIn</a:t>
-            </a:r>
-            <a:endParaRPr sz="1800" b="1" dirty="0"/>
-          </a:p>
-        </p:txBody>
-      </p:sp>
-      <p:sp>
-        <p:nvSpPr>
-          <p:cNvPr id="178" name="Google Shape;178;p15"/>
-          <p:cNvSpPr txBox="1">
-            <a:spLocks noGrp="1"/>
-          </p:cNvSpPr>
-          <p:nvPr>
-            <p:ph type="sldNum" idx="12"/>
-          </p:nvPr>
-        </p:nvSpPr>
-        <p:spPr>
-          <a:xfrm>
-            <a:off x="0" y="4762400"/>
-            <a:ext cx="381000" cy="386400"/>
-          </a:xfrm>
-          <a:prstGeom prst="rect">
-            <a:avLst/>
-          </a:prstGeom>
-        </p:spPr>
-        <p:txBody>
-          <a:bodyPr spcFirstLastPara="1" wrap="square" lIns="0" tIns="0" rIns="0" bIns="0" anchor="ctr" anchorCtr="0">
-            <a:noAutofit/>
-          </a:bodyPr>
-          <a:lstStyle/>
-          <a:p>
-            <a:pPr marL="0" lvl="0" indent="0" algn="ctr" rtl="0">
-              <a:spcBef>
-                <a:spcPts val="0"/>
-              </a:spcBef>
-              <a:spcAft>
-                <a:spcPts val="0"/>
-              </a:spcAft>
-              <a:buNone/>
-            </a:pPr>
-            <a:fld id="{00000000-1234-1234-1234-123412341234}" type="slidenum">
-              <a:rPr lang="en"/>
-              <a:t>2</a:t>
-            </a:fld>
-            <a:endParaRPr/>
-          </a:p>
-        </p:txBody>
-      </p:sp>
-      <p:pic>
-        <p:nvPicPr>
-          <p:cNvPr id="3" name="Picture 2">
-            <a:extLst>
-              <a:ext uri="{FF2B5EF4-FFF2-40B4-BE49-F238E27FC236}">
-                <a16:creationId xmlns:a16="http://schemas.microsoft.com/office/drawing/2014/main" id="{AA8107A8-37DC-6D4F-BD01-76831F0C33A0}"/>
-              </a:ext>
-            </a:extLst>
-          </p:cNvPr>
-          <p:cNvPicPr>
-            <a:picLocks noChangeAspect="1"/>
-          </p:cNvPicPr>
-          <p:nvPr/>
-        </p:nvPicPr>
-        <p:blipFill>
-          <a:blip r:embed="rId4"/>
-          <a:stretch>
-            <a:fillRect/>
-          </a:stretch>
-        </p:blipFill>
-        <p:spPr>
-          <a:xfrm>
-            <a:off x="4896740" y="709293"/>
-            <a:ext cx="3281584" cy="3640586"/>
-          </a:xfrm>
-          <a:prstGeom prst="rect">
-            <a:avLst/>
-          </a:prstGeom>
-        </p:spPr>
-      </p:pic>
-    </p:spTree>
-  </p:cSld>
-  <p:clrMapOvr>
-    <a:masterClrMapping/>
-  </p:clrMapOvr>
-</p:sld>
-</file>
-
-<file path=ppt/slides/slide20.xml><?xml version="1.0" encoding="utf-8"?>
+<file path=ppt/slides/slide21.xml><?xml version="1.0" encoding="utf-8"?>
 <p:sld xmlns:a="http://schemas.openxmlformats.org/drawingml/2006/main" xmlns:r="http://schemas.openxmlformats.org/officeDocument/2006/relationships" xmlns:p="http://schemas.openxmlformats.org/presentationml/2006/main">
   <p:cSld>
     <p:spTree>
@@ -14616,7 +14031,7 @@
             </a:pPr>
             <a:fld id="{00000000-1234-1234-1234-123412341234}" type="slidenum">
               <a:rPr lang="en"/>
-              <a:t>20</a:t>
+              <a:t>21</a:t>
             </a:fld>
             <a:endParaRPr/>
           </a:p>
@@ -15233,87 +14648,115 @@
           </a:lstStyle>
           <a:p>
             <a:r>
-              <a:rPr lang="en-US" sz="1800" dirty="0"/>
+              <a:rPr lang="en-US" sz="1400" dirty="0"/>
               <a:t>Hospital General Information and Star Ratings:</a:t>
             </a:r>
             <a:br>
-              <a:rPr lang="en-US" sz="1800" dirty="0"/>
+              <a:rPr lang="en-US" sz="1400" dirty="0"/>
             </a:br>
             <a:r>
-              <a:rPr lang="en-US" sz="1800" i="1" u="sng" dirty="0">
+              <a:rPr lang="en-US" sz="1400" i="1" u="sng" dirty="0">
                 <a:hlinkClick r:id="rId3"/>
               </a:rPr>
               <a:t>https://data.cms.gov/provider-data/dataset/xubh-q36u</a:t>
             </a:r>
-            <a:endParaRPr lang="en-US" sz="1800" dirty="0"/>
+            <a:endParaRPr lang="en-US" sz="1400" dirty="0"/>
           </a:p>
           <a:p>
             <a:pPr marL="76200" indent="0">
               <a:buFont typeface="Barlow Light"/>
               <a:buNone/>
             </a:pPr>
-            <a:endParaRPr lang="en-US" sz="1800" dirty="0"/>
+            <a:endParaRPr lang="en-US" sz="1400" dirty="0"/>
           </a:p>
           <a:p>
             <a:r>
-              <a:rPr lang="en-US" sz="1800" dirty="0"/>
+              <a:rPr lang="en-US" sz="1400" dirty="0"/>
               <a:t>Medicare Spending Per Beneficiary:</a:t>
             </a:r>
             <a:br>
-              <a:rPr lang="en-US" sz="1800" dirty="0"/>
+              <a:rPr lang="en-US" sz="1400" dirty="0"/>
             </a:br>
             <a:r>
-              <a:rPr lang="en-US" sz="1800" i="1" u="sng" dirty="0">
+              <a:rPr lang="en-US" sz="1400" i="1" u="sng" dirty="0">
                 <a:hlinkClick r:id="rId4"/>
               </a:rPr>
               <a:t>https://data.cms.gov/provider-data/dataset/rrqw-56er</a:t>
             </a:r>
-            <a:endParaRPr lang="en-US" sz="1800" dirty="0"/>
+            <a:endParaRPr lang="en-US" sz="1400" dirty="0"/>
           </a:p>
           <a:p>
             <a:pPr marL="76200" indent="0">
               <a:buFont typeface="Barlow Light"/>
               <a:buNone/>
             </a:pPr>
-            <a:endParaRPr lang="en-US" sz="1800" dirty="0"/>
+            <a:endParaRPr lang="en-US" sz="1400" dirty="0"/>
           </a:p>
           <a:p>
             <a:r>
-              <a:rPr lang="en-US" sz="1800" dirty="0"/>
+              <a:rPr lang="en-US" sz="1400" dirty="0"/>
               <a:t>Complication and Mortality Rates by Hospital:</a:t>
             </a:r>
             <a:br>
-              <a:rPr lang="en-US" sz="1800" dirty="0"/>
+              <a:rPr lang="en-US" sz="1400" dirty="0"/>
             </a:br>
             <a:r>
-              <a:rPr lang="en-US" sz="1800" i="1" u="sng" dirty="0">
+              <a:rPr lang="en-US" sz="1400" i="1" u="sng" dirty="0">
                 <a:hlinkClick r:id="rId5"/>
               </a:rPr>
               <a:t>https://data.cms.gov/provider-data/dataset/ynj2-r877</a:t>
             </a:r>
-            <a:endParaRPr lang="en-US" sz="1800" dirty="0"/>
+            <a:endParaRPr lang="en-US" sz="1400" dirty="0"/>
           </a:p>
           <a:p>
-            <a:endParaRPr lang="en-US" sz="1800" dirty="0"/>
+            <a:endParaRPr lang="en-US" sz="1400" dirty="0"/>
           </a:p>
           <a:p>
             <a:r>
-              <a:rPr lang="en-US" sz="1800" dirty="0"/>
+              <a:rPr lang="en-US" sz="1400" dirty="0"/>
               <a:t>Readmission Rates by Hospital:</a:t>
             </a:r>
             <a:br>
-              <a:rPr lang="en-US" sz="1800" dirty="0"/>
+              <a:rPr lang="en-US" sz="1400" dirty="0"/>
             </a:br>
             <a:r>
-              <a:rPr lang="en-US" sz="1800" i="1" u="sng" dirty="0">
+              <a:rPr lang="en-US" sz="1400" i="1" u="sng" dirty="0">
                 <a:hlinkClick r:id="rId6"/>
               </a:rPr>
               <a:t>https://data.cms.gov/provider-data/dataset/9n3s-kdb3</a:t>
             </a:r>
-            <a:endParaRPr lang="en-US" sz="1800" dirty="0"/>
+            <a:endParaRPr lang="en-US" sz="1400" i="1" u="sng" dirty="0"/>
           </a:p>
           <a:p>
-            <a:endParaRPr lang="en-US" sz="1800" dirty="0"/>
+            <a:endParaRPr lang="en-US" sz="1400" i="1" u="sng" dirty="0"/>
+          </a:p>
+          <a:p>
+            <a:r>
+              <a:rPr lang="en-US" sz="1400" dirty="0"/>
+              <a:t>Payment and Value of Care:</a:t>
+            </a:r>
+            <a:br>
+              <a:rPr lang="en-US" sz="1400" dirty="0"/>
+            </a:br>
+            <a:r>
+              <a:rPr lang="en-US" sz="1400" i="1" u="sng" dirty="0">
+                <a:hlinkClick r:id="rId7"/>
+              </a:rPr>
+              <a:t>https://</a:t>
+            </a:r>
+            <a:r>
+              <a:rPr lang="en-US" sz="1400" i="1" u="sng" dirty="0" err="1">
+                <a:hlinkClick r:id="rId7"/>
+              </a:rPr>
+              <a:t>data.cms.gov</a:t>
+            </a:r>
+            <a:r>
+              <a:rPr lang="en-US" sz="1400" i="1" u="sng" dirty="0">
+                <a:hlinkClick r:id="rId7"/>
+              </a:rPr>
+              <a:t>/provider-data/dataset/c7us-v4mf</a:t>
+            </a:r>
+            <a:endParaRPr lang="en-US" sz="1400" dirty="0"/>
           </a:p>
           <a:p>
             <a:pPr marL="76200" indent="0">
@@ -15328,153 +14771,6 @@
     <p:extLst>
       <p:ext uri="{BB962C8B-B14F-4D97-AF65-F5344CB8AC3E}">
         <p14:creationId xmlns:p14="http://schemas.microsoft.com/office/powerpoint/2010/main" val="2172126349"/>
-      </p:ext>
-    </p:extLst>
-  </p:cSld>
-  <p:clrMapOvr>
-    <a:masterClrMapping/>
-  </p:clrMapOvr>
-</p:sld>
-</file>
-
-<file path=ppt/slides/slide21.xml><?xml version="1.0" encoding="utf-8"?>
-<p:sld xmlns:a="http://schemas.openxmlformats.org/drawingml/2006/main" xmlns:r="http://schemas.openxmlformats.org/officeDocument/2006/relationships" xmlns:p="http://schemas.openxmlformats.org/presentationml/2006/main">
-  <p:cSld>
-    <p:spTree>
-      <p:nvGrpSpPr>
-        <p:cNvPr id="1" name="Shape 343"/>
-        <p:cNvGrpSpPr/>
-        <p:nvPr/>
-      </p:nvGrpSpPr>
-      <p:grpSpPr>
-        <a:xfrm>
-          <a:off x="0" y="0"/>
-          <a:ext cx="0" cy="0"/>
-          <a:chOff x="0" y="0"/>
-          <a:chExt cx="0" cy="0"/>
-        </a:xfrm>
-      </p:grpSpPr>
-      <p:sp>
-        <p:nvSpPr>
-          <p:cNvPr id="344" name="Google Shape;344;p27"/>
-          <p:cNvSpPr txBox="1">
-            <a:spLocks noGrp="1"/>
-          </p:cNvSpPr>
-          <p:nvPr>
-            <p:ph type="ctrTitle" idx="4294967295"/>
-          </p:nvPr>
-        </p:nvSpPr>
-        <p:spPr>
-          <a:xfrm>
-            <a:off x="1152300" y="563525"/>
-            <a:ext cx="6337007" cy="882503"/>
-          </a:xfrm>
-          <a:prstGeom prst="rect">
-            <a:avLst/>
-          </a:prstGeom>
-        </p:spPr>
-        <p:txBody>
-          <a:bodyPr spcFirstLastPara="1" wrap="square" lIns="0" tIns="0" rIns="0" bIns="0" anchor="ctr" anchorCtr="0">
-            <a:noAutofit/>
-          </a:bodyPr>
-          <a:lstStyle/>
-          <a:p>
-            <a:pPr marL="0" lvl="0" indent="0" algn="ctr" rtl="0">
-              <a:spcBef>
-                <a:spcPts val="0"/>
-              </a:spcBef>
-              <a:spcAft>
-                <a:spcPts val="0"/>
-              </a:spcAft>
-              <a:buNone/>
-            </a:pPr>
-            <a:r>
-              <a:rPr lang="en" sz="6000" dirty="0"/>
-              <a:t>Thanks!</a:t>
-            </a:r>
-            <a:br>
-              <a:rPr lang="en" sz="7200" dirty="0"/>
-            </a:br>
-            <a:endParaRPr sz="3200" dirty="0"/>
-          </a:p>
-        </p:txBody>
-      </p:sp>
-      <p:sp>
-        <p:nvSpPr>
-          <p:cNvPr id="346" name="Google Shape;346;p27"/>
-          <p:cNvSpPr txBox="1">
-            <a:spLocks noGrp="1"/>
-          </p:cNvSpPr>
-          <p:nvPr>
-            <p:ph type="sldNum" idx="12"/>
-          </p:nvPr>
-        </p:nvSpPr>
-        <p:spPr>
-          <a:xfrm>
-            <a:off x="0" y="4762400"/>
-            <a:ext cx="381000" cy="386400"/>
-          </a:xfrm>
-          <a:prstGeom prst="rect">
-            <a:avLst/>
-          </a:prstGeom>
-        </p:spPr>
-        <p:txBody>
-          <a:bodyPr spcFirstLastPara="1" wrap="square" lIns="0" tIns="0" rIns="0" bIns="0" anchor="ctr" anchorCtr="0">
-            <a:noAutofit/>
-          </a:bodyPr>
-          <a:lstStyle/>
-          <a:p>
-            <a:pPr marL="0" lvl="0" indent="0" algn="ctr" rtl="0">
-              <a:spcBef>
-                <a:spcPts val="0"/>
-              </a:spcBef>
-              <a:spcAft>
-                <a:spcPts val="0"/>
-              </a:spcAft>
-              <a:buNone/>
-            </a:pPr>
-            <a:fld id="{00000000-1234-1234-1234-123412341234}" type="slidenum">
-              <a:rPr lang="en"/>
-              <a:t>21</a:t>
-            </a:fld>
-            <a:endParaRPr/>
-          </a:p>
-        </p:txBody>
-      </p:sp>
-      <p:pic>
-        <p:nvPicPr>
-          <p:cNvPr id="2" name="Picture 1">
-            <a:extLst>
-              <a:ext uri="{FF2B5EF4-FFF2-40B4-BE49-F238E27FC236}">
-                <a16:creationId xmlns:a16="http://schemas.microsoft.com/office/drawing/2014/main" id="{C1C4ECD3-6AB0-674F-918E-3283F4AD6857}"/>
-              </a:ext>
-            </a:extLst>
-          </p:cNvPr>
-          <p:cNvPicPr>
-            <a:picLocks noChangeAspect="1"/>
-          </p:cNvPicPr>
-          <p:nvPr/>
-        </p:nvPicPr>
-        <p:blipFill>
-          <a:blip r:embed="rId3"/>
-          <a:stretch>
-            <a:fillRect/>
-          </a:stretch>
-        </p:blipFill>
-        <p:spPr>
-          <a:xfrm>
-            <a:off x="1674036" y="1148317"/>
-            <a:ext cx="5293534" cy="3529023"/>
-          </a:xfrm>
-          <a:prstGeom prst="rect">
-            <a:avLst/>
-          </a:prstGeom>
-        </p:spPr>
-      </p:pic>
-    </p:spTree>
-    <p:extLst>
-      <p:ext uri="{BB962C8B-B14F-4D97-AF65-F5344CB8AC3E}">
-        <p14:creationId xmlns:p14="http://schemas.microsoft.com/office/powerpoint/2010/main" val="2272813329"/>
       </p:ext>
     </p:extLst>
   </p:cSld>
@@ -15676,7 +14972,7 @@
               </a:lnSpc>
             </a:pPr>
             <a:r>
-              <a:rPr lang="en-US" sz="3750">
+              <a:rPr lang="en-US" sz="3750" dirty="0">
                 <a:solidFill>
                   <a:srgbClr val="FFFFFF"/>
                 </a:solidFill>
@@ -15687,7 +14983,7 @@
               </a:rPr>
               <a:t>Table of </a:t>
             </a:r>
-            <a:endParaRPr sz="700"/>
+            <a:endParaRPr sz="700" dirty="0"/>
           </a:p>
           <a:p>
             <a:pPr algn="ctr">
@@ -15696,7 +14992,7 @@
               </a:lnSpc>
             </a:pPr>
             <a:r>
-              <a:rPr lang="en-US" sz="3750">
+              <a:rPr lang="en-US" sz="3750" dirty="0">
                 <a:solidFill>
                   <a:srgbClr val="FFFFFF"/>
                 </a:solidFill>
@@ -15707,7 +15003,7 @@
               </a:rPr>
               <a:t>Contents</a:t>
             </a:r>
-            <a:endParaRPr sz="700"/>
+            <a:endParaRPr sz="700" dirty="0"/>
           </a:p>
         </p:txBody>
       </p:sp>
@@ -16130,8 +15426,8 @@
         </p:nvSpPr>
         <p:spPr>
           <a:xfrm>
-            <a:off x="6267357" y="3722286"/>
-            <a:ext cx="2073274" cy="603242"/>
+            <a:off x="6267357" y="3803125"/>
+            <a:ext cx="2208823" cy="301621"/>
           </a:xfrm>
           <a:prstGeom prst="rect">
             <a:avLst/>
@@ -16154,7 +15450,7 @@
             </a:pPr>
             <a:r>
               <a:rPr lang="en-US" dirty="0"/>
-              <a:t>Conclusions, Data Limitations, &amp; Next Steps</a:t>
+              <a:t>Conclusions, &amp; Next Steps</a:t>
             </a:r>
             <a:endParaRPr dirty="0"/>
           </a:p>
@@ -16267,299 +15563,6 @@
   <p:clrMapOvr>
     <a:masterClrMapping/>
   </p:clrMapOvr>
-  <p:timing>
-    <p:tnLst>
-      <p:par>
-        <p:cTn id="1" dur="indefinite" restart="never" nodeType="tmRoot">
-          <p:childTnLst>
-            <p:seq concurrent="1" nextAc="seek">
-              <p:cTn id="2" dur="indefinite" nodeType="mainSeq">
-                <p:childTnLst>
-                  <p:par>
-                    <p:cTn id="3" fill="hold">
-                      <p:stCondLst>
-                        <p:cond delay="indefinite"/>
-                      </p:stCondLst>
-                      <p:childTnLst>
-                        <p:par>
-                          <p:cTn id="4" fill="hold">
-                            <p:stCondLst>
-                              <p:cond delay="0"/>
-                            </p:stCondLst>
-                            <p:childTnLst>
-                              <p:par>
-                                <p:cTn id="5" presetID="10" presetClass="entr" presetSubtype="0" fill="hold" nodeType="clickEffect">
-                                  <p:stCondLst>
-                                    <p:cond delay="0"/>
-                                  </p:stCondLst>
-                                  <p:childTnLst>
-                                    <p:set>
-                                      <p:cBhvr>
-                                        <p:cTn id="6" dur="1" fill="hold">
-                                          <p:stCondLst>
-                                            <p:cond delay="0"/>
-                                          </p:stCondLst>
-                                        </p:cTn>
-                                        <p:tgtEl>
-                                          <p:spTgt spid="125"/>
-                                        </p:tgtEl>
-                                        <p:attrNameLst>
-                                          <p:attrName>style.visibility</p:attrName>
-                                        </p:attrNameLst>
-                                      </p:cBhvr>
-                                      <p:to>
-                                        <p:strVal val="visible"/>
-                                      </p:to>
-                                    </p:set>
-                                    <p:animEffect transition="in" filter="fade">
-                                      <p:cBhvr>
-                                        <p:cTn id="7" dur="500"/>
-                                        <p:tgtEl>
-                                          <p:spTgt spid="125"/>
-                                        </p:tgtEl>
-                                      </p:cBhvr>
-                                    </p:animEffect>
-                                  </p:childTnLst>
-                                </p:cTn>
-                              </p:par>
-                              <p:par>
-                                <p:cTn id="8" presetID="10" presetClass="entr" presetSubtype="0" fill="hold" nodeType="withEffect">
-                                  <p:stCondLst>
-                                    <p:cond delay="0"/>
-                                  </p:stCondLst>
-                                  <p:childTnLst>
-                                    <p:set>
-                                      <p:cBhvr>
-                                        <p:cTn id="9" dur="1" fill="hold">
-                                          <p:stCondLst>
-                                            <p:cond delay="0"/>
-                                          </p:stCondLst>
-                                        </p:cTn>
-                                        <p:tgtEl>
-                                          <p:spTgt spid="134"/>
-                                        </p:tgtEl>
-                                        <p:attrNameLst>
-                                          <p:attrName>style.visibility</p:attrName>
-                                        </p:attrNameLst>
-                                      </p:cBhvr>
-                                      <p:to>
-                                        <p:strVal val="visible"/>
-                                      </p:to>
-                                    </p:set>
-                                    <p:animEffect transition="in" filter="fade">
-                                      <p:cBhvr>
-                                        <p:cTn id="10" dur="500"/>
-                                        <p:tgtEl>
-                                          <p:spTgt spid="134"/>
-                                        </p:tgtEl>
-                                      </p:cBhvr>
-                                    </p:animEffect>
-                                  </p:childTnLst>
-                                </p:cTn>
-                              </p:par>
-                              <p:par>
-                                <p:cTn id="11" presetID="10" presetClass="entr" presetSubtype="0" fill="hold" nodeType="withEffect">
-                                  <p:stCondLst>
-                                    <p:cond delay="0"/>
-                                  </p:stCondLst>
-                                  <p:childTnLst>
-                                    <p:set>
-                                      <p:cBhvr>
-                                        <p:cTn id="12" dur="1" fill="hold">
-                                          <p:stCondLst>
-                                            <p:cond delay="0"/>
-                                          </p:stCondLst>
-                                        </p:cTn>
-                                        <p:tgtEl>
-                                          <p:spTgt spid="135"/>
-                                        </p:tgtEl>
-                                        <p:attrNameLst>
-                                          <p:attrName>style.visibility</p:attrName>
-                                        </p:attrNameLst>
-                                      </p:cBhvr>
-                                      <p:to>
-                                        <p:strVal val="visible"/>
-                                      </p:to>
-                                    </p:set>
-                                    <p:animEffect transition="in" filter="fade">
-                                      <p:cBhvr>
-                                        <p:cTn id="13" dur="500"/>
-                                        <p:tgtEl>
-                                          <p:spTgt spid="135"/>
-                                        </p:tgtEl>
-                                      </p:cBhvr>
-                                    </p:animEffect>
-                                  </p:childTnLst>
-                                </p:cTn>
-                              </p:par>
-                              <p:par>
-                                <p:cTn id="14" presetID="10" presetClass="entr" presetSubtype="0" fill="hold" nodeType="withEffect">
-                                  <p:stCondLst>
-                                    <p:cond delay="0"/>
-                                  </p:stCondLst>
-                                  <p:childTnLst>
-                                    <p:set>
-                                      <p:cBhvr>
-                                        <p:cTn id="15" dur="1" fill="hold">
-                                          <p:stCondLst>
-                                            <p:cond delay="0"/>
-                                          </p:stCondLst>
-                                        </p:cTn>
-                                        <p:tgtEl>
-                                          <p:spTgt spid="131"/>
-                                        </p:tgtEl>
-                                        <p:attrNameLst>
-                                          <p:attrName>style.visibility</p:attrName>
-                                        </p:attrNameLst>
-                                      </p:cBhvr>
-                                      <p:to>
-                                        <p:strVal val="visible"/>
-                                      </p:to>
-                                    </p:set>
-                                    <p:animEffect transition="in" filter="fade">
-                                      <p:cBhvr>
-                                        <p:cTn id="16" dur="500"/>
-                                        <p:tgtEl>
-                                          <p:spTgt spid="131"/>
-                                        </p:tgtEl>
-                                      </p:cBhvr>
-                                    </p:animEffect>
-                                  </p:childTnLst>
-                                </p:cTn>
-                              </p:par>
-                              <p:par>
-                                <p:cTn id="17" presetID="10" presetClass="entr" presetSubtype="0" fill="hold" nodeType="withEffect">
-                                  <p:stCondLst>
-                                    <p:cond delay="0"/>
-                                  </p:stCondLst>
-                                  <p:childTnLst>
-                                    <p:set>
-                                      <p:cBhvr>
-                                        <p:cTn id="18" dur="1" fill="hold">
-                                          <p:stCondLst>
-                                            <p:cond delay="0"/>
-                                          </p:stCondLst>
-                                        </p:cTn>
-                                        <p:tgtEl>
-                                          <p:spTgt spid="29"/>
-                                        </p:tgtEl>
-                                        <p:attrNameLst>
-                                          <p:attrName>style.visibility</p:attrName>
-                                        </p:attrNameLst>
-                                      </p:cBhvr>
-                                      <p:to>
-                                        <p:strVal val="visible"/>
-                                      </p:to>
-                                    </p:set>
-                                    <p:animEffect transition="in" filter="fade">
-                                      <p:cBhvr>
-                                        <p:cTn id="19" dur="500"/>
-                                        <p:tgtEl>
-                                          <p:spTgt spid="29"/>
-                                        </p:tgtEl>
-                                      </p:cBhvr>
-                                    </p:animEffect>
-                                  </p:childTnLst>
-                                </p:cTn>
-                              </p:par>
-                              <p:par>
-                                <p:cTn id="20" presetID="10" presetClass="entr" presetSubtype="0" fill="hold" nodeType="withEffect">
-                                  <p:stCondLst>
-                                    <p:cond delay="0"/>
-                                  </p:stCondLst>
-                                  <p:childTnLst>
-                                    <p:set>
-                                      <p:cBhvr>
-                                        <p:cTn id="21" dur="1" fill="hold">
-                                          <p:stCondLst>
-                                            <p:cond delay="0"/>
-                                          </p:stCondLst>
-                                        </p:cTn>
-                                        <p:tgtEl>
-                                          <p:spTgt spid="32"/>
-                                        </p:tgtEl>
-                                        <p:attrNameLst>
-                                          <p:attrName>style.visibility</p:attrName>
-                                        </p:attrNameLst>
-                                      </p:cBhvr>
-                                      <p:to>
-                                        <p:strVal val="visible"/>
-                                      </p:to>
-                                    </p:set>
-                                    <p:animEffect transition="in" filter="fade">
-                                      <p:cBhvr>
-                                        <p:cTn id="22" dur="500"/>
-                                        <p:tgtEl>
-                                          <p:spTgt spid="32"/>
-                                        </p:tgtEl>
-                                      </p:cBhvr>
-                                    </p:animEffect>
-                                  </p:childTnLst>
-                                </p:cTn>
-                              </p:par>
-                              <p:par>
-                                <p:cTn id="23" presetID="10" presetClass="entr" presetSubtype="0" fill="hold" nodeType="withEffect">
-                                  <p:stCondLst>
-                                    <p:cond delay="0"/>
-                                  </p:stCondLst>
-                                  <p:childTnLst>
-                                    <p:set>
-                                      <p:cBhvr>
-                                        <p:cTn id="24" dur="1" fill="hold">
-                                          <p:stCondLst>
-                                            <p:cond delay="0"/>
-                                          </p:stCondLst>
-                                        </p:cTn>
-                                        <p:tgtEl>
-                                          <p:spTgt spid="35"/>
-                                        </p:tgtEl>
-                                        <p:attrNameLst>
-                                          <p:attrName>style.visibility</p:attrName>
-                                        </p:attrNameLst>
-                                      </p:cBhvr>
-                                      <p:to>
-                                        <p:strVal val="visible"/>
-                                      </p:to>
-                                    </p:set>
-                                    <p:animEffect transition="in" filter="fade">
-                                      <p:cBhvr>
-                                        <p:cTn id="25" dur="500"/>
-                                        <p:tgtEl>
-                                          <p:spTgt spid="35"/>
-                                        </p:tgtEl>
-                                      </p:cBhvr>
-                                    </p:animEffect>
-                                  </p:childTnLst>
-                                </p:cTn>
-                              </p:par>
-                            </p:childTnLst>
-                          </p:cTn>
-                        </p:par>
-                      </p:childTnLst>
-                    </p:cTn>
-                  </p:par>
-                </p:childTnLst>
-              </p:cTn>
-              <p:prevCondLst>
-                <p:cond evt="onPrev" delay="0">
-                  <p:tgtEl>
-                    <p:sldTgt/>
-                  </p:tgtEl>
-                </p:cond>
-              </p:prevCondLst>
-              <p:nextCondLst>
-                <p:cond evt="onNext" delay="0">
-                  <p:tgtEl>
-                    <p:sldTgt/>
-                  </p:tgtEl>
-                </p:cond>
-              </p:nextCondLst>
-            </p:seq>
-          </p:childTnLst>
-        </p:cTn>
-      </p:par>
-    </p:tnLst>
-  </p:timing>
 </p:sld>
 </file>
 
@@ -18025,7 +17028,7 @@
             <a:pPr lvl="0"/>
             <a:r>
               <a:rPr lang="en" dirty="0"/>
-              <a:t>CMS is a public resource with many different datasets that contain cost and quality outcome metrics</a:t>
+              <a:t>CMS is a public resource with many different datasets that contain cost and quality outcome metrics for various hospitals across the US.</a:t>
             </a:r>
           </a:p>
           <a:p>
